--- a/05 - HTTP/slides.pptx
+++ b/05 - HTTP/slides.pptx
@@ -2,58 +2,58 @@
 <file path=ppt/presentation.xml><?xml version="1.0" encoding="utf-8"?>
 <p:presentation xmlns:a="http://schemas.openxmlformats.org/drawingml/2006/main" xmlns:r="http://schemas.openxmlformats.org/officeDocument/2006/relationships" xmlns:p="http://schemas.openxmlformats.org/presentationml/2006/main" strictFirstAndLastChars="0" embedTrueTypeFonts="1" saveSubsetFonts="1" autoCompressPictures="0">
   <p:sldMasterIdLst>
-    <p:sldMasterId id="2147483670" r:id="rId1"/>
-    <p:sldMasterId id="2147483671" r:id="rId2"/>
+    <p:sldMasterId id="2147483670" r:id="rId4"/>
+    <p:sldMasterId id="2147483671" r:id="rId5"/>
   </p:sldMasterIdLst>
   <p:notesMasterIdLst>
-    <p:notesMasterId r:id="rId31"/>
+    <p:notesMasterId r:id="rId34"/>
   </p:notesMasterIdLst>
   <p:sldIdLst>
-    <p:sldId id="256" r:id="rId3"/>
-    <p:sldId id="257" r:id="rId4"/>
-    <p:sldId id="258" r:id="rId5"/>
-    <p:sldId id="259" r:id="rId6"/>
-    <p:sldId id="260" r:id="rId7"/>
-    <p:sldId id="261" r:id="rId8"/>
-    <p:sldId id="262" r:id="rId9"/>
-    <p:sldId id="263" r:id="rId10"/>
-    <p:sldId id="264" r:id="rId11"/>
-    <p:sldId id="266" r:id="rId12"/>
-    <p:sldId id="267" r:id="rId13"/>
-    <p:sldId id="278" r:id="rId14"/>
-    <p:sldId id="279" r:id="rId15"/>
-    <p:sldId id="280" r:id="rId16"/>
-    <p:sldId id="281" r:id="rId17"/>
-    <p:sldId id="282" r:id="rId18"/>
-    <p:sldId id="283" r:id="rId19"/>
-    <p:sldId id="284" r:id="rId20"/>
-    <p:sldId id="268" r:id="rId21"/>
-    <p:sldId id="269" r:id="rId22"/>
-    <p:sldId id="270" r:id="rId23"/>
-    <p:sldId id="271" r:id="rId24"/>
-    <p:sldId id="272" r:id="rId25"/>
-    <p:sldId id="273" r:id="rId26"/>
-    <p:sldId id="274" r:id="rId27"/>
-    <p:sldId id="275" r:id="rId28"/>
-    <p:sldId id="276" r:id="rId29"/>
-    <p:sldId id="277" r:id="rId30"/>
+    <p:sldId id="256" r:id="rId6"/>
+    <p:sldId id="257" r:id="rId7"/>
+    <p:sldId id="258" r:id="rId8"/>
+    <p:sldId id="259" r:id="rId9"/>
+    <p:sldId id="260" r:id="rId10"/>
+    <p:sldId id="261" r:id="rId11"/>
+    <p:sldId id="262" r:id="rId12"/>
+    <p:sldId id="263" r:id="rId13"/>
+    <p:sldId id="264" r:id="rId14"/>
+    <p:sldId id="266" r:id="rId15"/>
+    <p:sldId id="267" r:id="rId16"/>
+    <p:sldId id="278" r:id="rId17"/>
+    <p:sldId id="279" r:id="rId18"/>
+    <p:sldId id="280" r:id="rId19"/>
+    <p:sldId id="281" r:id="rId20"/>
+    <p:sldId id="282" r:id="rId21"/>
+    <p:sldId id="283" r:id="rId22"/>
+    <p:sldId id="284" r:id="rId23"/>
+    <p:sldId id="268" r:id="rId24"/>
+    <p:sldId id="269" r:id="rId25"/>
+    <p:sldId id="270" r:id="rId26"/>
+    <p:sldId id="271" r:id="rId27"/>
+    <p:sldId id="272" r:id="rId28"/>
+    <p:sldId id="273" r:id="rId29"/>
+    <p:sldId id="274" r:id="rId30"/>
+    <p:sldId id="275" r:id="rId31"/>
+    <p:sldId id="276" r:id="rId32"/>
+    <p:sldId id="277" r:id="rId33"/>
   </p:sldIdLst>
   <p:sldSz cx="9144000" cy="6858000" type="screen4x3"/>
   <p:notesSz cx="6858000" cy="9144000"/>
   <p:embeddedFontLst>
     <p:embeddedFont>
-      <p:font typeface="Economica" panose="02000506040000020004" pitchFamily="2" charset="77"/>
-      <p:regular r:id="rId32"/>
-      <p:bold r:id="rId33"/>
-      <p:italic r:id="rId34"/>
-      <p:boldItalic r:id="rId35"/>
+      <p:font typeface="Economica" panose="02000506040000020004"/>
+      <p:regular r:id="rId35"/>
+      <p:bold r:id="rId36"/>
+      <p:italic r:id="rId37"/>
+      <p:boldItalic r:id="rId38"/>
     </p:embeddedFont>
     <p:embeddedFont>
       <p:font typeface="Open Sans" panose="020B0606030504020204" pitchFamily="34" charset="0"/>
-      <p:regular r:id="rId36"/>
-      <p:bold r:id="rId37"/>
-      <p:italic r:id="rId38"/>
-      <p:boldItalic r:id="rId39"/>
+      <p:regular r:id="rId39"/>
+      <p:bold r:id="rId40"/>
+      <p:italic r:id="rId41"/>
+      <p:boldItalic r:id="rId42"/>
     </p:embeddedFont>
   </p:embeddedFontLst>
   <p:defaultTextStyle>
@@ -296,7 +296,7 @@
 <file path=ppt/revisionInfo.xml><?xml version="1.0" encoding="utf-8"?>
 <p1510:revInfo xmlns:a="http://schemas.openxmlformats.org/drawingml/2006/main" xmlns:r="http://schemas.openxmlformats.org/officeDocument/2006/relationships" xmlns:p1510="http://schemas.microsoft.com/office/powerpoint/2015/10/main">
   <p1510:revLst>
-    <p1510:client id="{97383AD6-40CD-6A43-8934-40A237B55ECF}" v="32" dt="2023-03-23T09:51:31.272"/>
+    <p1510:client id="{3737D834-C874-7A45-A86A-81B431AA7AC8}" v="4" dt="2026-04-22T06:54:48.173"/>
   </p1510:revLst>
 </p1510:revInfo>
 </file>
@@ -304,944 +304,109 @@
 <file path=ppt/changesInfos/changesInfo1.xml><?xml version="1.0" encoding="utf-8"?>
 <pc:chgInfo xmlns:a="http://schemas.openxmlformats.org/drawingml/2006/main" xmlns:r="http://schemas.openxmlformats.org/officeDocument/2006/relationships" xmlns:ac="http://schemas.microsoft.com/office/drawing/2013/main/command" xmlns:pc="http://schemas.microsoft.com/office/powerpoint/2013/main/command">
   <pc:docChgLst>
-    <pc:chgData name="Riccardo Berta" userId="c8694f89-bba4-4576-b0a8-456619ca5a8c" providerId="ADAL" clId="{3F77A462-6347-E641-AA99-0C769B8B031A}"/>
-    <pc:docChg chg="undo custSel modSld">
-      <pc:chgData name="Riccardo Berta" userId="c8694f89-bba4-4576-b0a8-456619ca5a8c" providerId="ADAL" clId="{3F77A462-6347-E641-AA99-0C769B8B031A}" dt="2022-03-16T09:45:29.960" v="220" actId="20577"/>
+    <pc:chgData name="Riccardo Berta" userId="c8694f89-bba4-4576-b0a8-456619ca5a8c" providerId="ADAL" clId="{FDDBFC5A-5EA9-5330-BEB8-433D7E3B4C4E}"/>
+    <pc:docChg chg="custSel modSld">
+      <pc:chgData name="Riccardo Berta" userId="c8694f89-bba4-4576-b0a8-456619ca5a8c" providerId="ADAL" clId="{FDDBFC5A-5EA9-5330-BEB8-433D7E3B4C4E}" dt="2026-04-22T06:54:56.540" v="19" actId="1076"/>
       <pc:docMkLst>
         <pc:docMk/>
       </pc:docMkLst>
-      <pc:sldChg chg="addSp modSp mod modNotes">
-        <pc:chgData name="Riccardo Berta" userId="c8694f89-bba4-4576-b0a8-456619ca5a8c" providerId="ADAL" clId="{3F77A462-6347-E641-AA99-0C769B8B031A}" dt="2022-03-11T12:13:12.844" v="32" actId="1076"/>
+      <pc:sldChg chg="addSp delSp modSp mod">
+        <pc:chgData name="Riccardo Berta" userId="c8694f89-bba4-4576-b0a8-456619ca5a8c" providerId="ADAL" clId="{FDDBFC5A-5EA9-5330-BEB8-433D7E3B4C4E}" dt="2026-04-22T06:52:19.905" v="6" actId="1076"/>
         <pc:sldMkLst>
           <pc:docMk/>
           <pc:sldMk cId="0" sldId="257"/>
         </pc:sldMkLst>
-        <pc:spChg chg="mod">
-          <ac:chgData name="Riccardo Berta" userId="c8694f89-bba4-4576-b0a8-456619ca5a8c" providerId="ADAL" clId="{3F77A462-6347-E641-AA99-0C769B8B031A}" dt="2022-03-11T12:13:10.767" v="31" actId="1076"/>
-          <ac:spMkLst>
-            <pc:docMk/>
-            <pc:sldMk cId="0" sldId="257"/>
-            <ac:spMk id="137" creationId="{00000000-0000-0000-0000-000000000000}"/>
-          </ac:spMkLst>
-        </pc:spChg>
-        <pc:picChg chg="mod">
-          <ac:chgData name="Riccardo Berta" userId="c8694f89-bba4-4576-b0a8-456619ca5a8c" providerId="ADAL" clId="{3F77A462-6347-E641-AA99-0C769B8B031A}" dt="2022-03-09T07:50:58.538" v="0"/>
+        <pc:picChg chg="add mod">
+          <ac:chgData name="Riccardo Berta" userId="c8694f89-bba4-4576-b0a8-456619ca5a8c" providerId="ADAL" clId="{FDDBFC5A-5EA9-5330-BEB8-433D7E3B4C4E}" dt="2026-04-22T06:52:19.905" v="6" actId="1076"/>
           <ac:picMkLst>
             <pc:docMk/>
             <pc:sldMk cId="0" sldId="257"/>
-            <ac:picMk id="138" creationId="{00000000-0000-0000-0000-000000000000}"/>
+            <ac:picMk id="2" creationId="{F340A9E8-96FA-7499-3AF1-66E47ED550D0}"/>
+          </ac:picMkLst>
+        </pc:picChg>
+        <pc:picChg chg="del">
+          <ac:chgData name="Riccardo Berta" userId="c8694f89-bba4-4576-b0a8-456619ca5a8c" providerId="ADAL" clId="{FDDBFC5A-5EA9-5330-BEB8-433D7E3B4C4E}" dt="2026-04-22T06:52:06.724" v="2" actId="478"/>
+          <ac:picMkLst>
+            <pc:docMk/>
+            <pc:sldMk cId="0" sldId="257"/>
+            <ac:picMk id="3" creationId="{FEF13CAD-8013-E50E-52DC-93292D8A5289}"/>
+          </ac:picMkLst>
+        </pc:picChg>
+      </pc:sldChg>
+      <pc:sldChg chg="addSp delSp modSp mod">
+        <pc:chgData name="Riccardo Berta" userId="c8694f89-bba4-4576-b0a8-456619ca5a8c" providerId="ADAL" clId="{FDDBFC5A-5EA9-5330-BEB8-433D7E3B4C4E}" dt="2026-04-22T06:53:35.866" v="12" actId="1076"/>
+        <pc:sldMkLst>
+          <pc:docMk/>
+          <pc:sldMk cId="0" sldId="259"/>
+        </pc:sldMkLst>
+        <pc:picChg chg="add mod">
+          <ac:chgData name="Riccardo Berta" userId="c8694f89-bba4-4576-b0a8-456619ca5a8c" providerId="ADAL" clId="{FDDBFC5A-5EA9-5330-BEB8-433D7E3B4C4E}" dt="2026-04-22T06:52:40.037" v="9" actId="1076"/>
+          <ac:picMkLst>
+            <pc:docMk/>
+            <pc:sldMk cId="0" sldId="259"/>
+            <ac:picMk id="2" creationId="{DB73E912-8E2B-5F91-10D0-3BC8757B633B}"/>
+          </ac:picMkLst>
+        </pc:picChg>
+        <pc:picChg chg="del">
+          <ac:chgData name="Riccardo Berta" userId="c8694f89-bba4-4576-b0a8-456619ca5a8c" providerId="ADAL" clId="{FDDBFC5A-5EA9-5330-BEB8-433D7E3B4C4E}" dt="2026-04-22T06:52:36.317" v="7" actId="478"/>
+          <ac:picMkLst>
+            <pc:docMk/>
+            <pc:sldMk cId="0" sldId="259"/>
+            <ac:picMk id="3" creationId="{2BC676C8-E391-74D9-9631-19DD814DB2E3}"/>
           </ac:picMkLst>
         </pc:picChg>
         <pc:picChg chg="add mod">
-          <ac:chgData name="Riccardo Berta" userId="c8694f89-bba4-4576-b0a8-456619ca5a8c" providerId="ADAL" clId="{3F77A462-6347-E641-AA99-0C769B8B031A}" dt="2022-03-11T12:13:12.844" v="32" actId="1076"/>
+          <ac:chgData name="Riccardo Berta" userId="c8694f89-bba4-4576-b0a8-456619ca5a8c" providerId="ADAL" clId="{FDDBFC5A-5EA9-5330-BEB8-433D7E3B4C4E}" dt="2026-04-22T06:53:35.866" v="12" actId="1076"/>
           <ac:picMkLst>
             <pc:docMk/>
-            <pc:sldMk cId="0" sldId="257"/>
-            <ac:picMk id="1026" creationId="{C8FFA10B-2EBE-A649-BE34-AB2456924AC7}"/>
+            <pc:sldMk cId="0" sldId="259"/>
+            <ac:picMk id="4" creationId="{B3D26AEB-9AF5-2260-90BB-676F18C37842}"/>
+          </ac:picMkLst>
+        </pc:picChg>
+        <pc:picChg chg="del">
+          <ac:chgData name="Riccardo Berta" userId="c8694f89-bba4-4576-b0a8-456619ca5a8c" providerId="ADAL" clId="{FDDBFC5A-5EA9-5330-BEB8-433D7E3B4C4E}" dt="2026-04-22T06:53:32.162" v="10" actId="478"/>
+          <ac:picMkLst>
+            <pc:docMk/>
+            <pc:sldMk cId="0" sldId="259"/>
+            <ac:picMk id="5" creationId="{9EDADE26-6341-E0DF-10B1-AB6A98FEA74E}"/>
+          </ac:picMkLst>
+        </pc:picChg>
+      </pc:sldChg>
+      <pc:sldChg chg="addSp delSp modSp mod">
+        <pc:chgData name="Riccardo Berta" userId="c8694f89-bba4-4576-b0a8-456619ca5a8c" providerId="ADAL" clId="{FDDBFC5A-5EA9-5330-BEB8-433D7E3B4C4E}" dt="2026-04-22T06:54:56.540" v="19" actId="1076"/>
+        <pc:sldMkLst>
+          <pc:docMk/>
+          <pc:sldMk cId="0" sldId="266"/>
+        </pc:sldMkLst>
+        <pc:picChg chg="add mod">
+          <ac:chgData name="Riccardo Berta" userId="c8694f89-bba4-4576-b0a8-456619ca5a8c" providerId="ADAL" clId="{FDDBFC5A-5EA9-5330-BEB8-433D7E3B4C4E}" dt="2026-04-22T06:54:56.540" v="19" actId="1076"/>
+          <ac:picMkLst>
+            <pc:docMk/>
+            <pc:sldMk cId="0" sldId="266"/>
+            <ac:picMk id="2" creationId="{9DAA82FC-073D-A822-122B-20CC6551EB73}"/>
+          </ac:picMkLst>
+        </pc:picChg>
+        <pc:picChg chg="del">
+          <ac:chgData name="Riccardo Berta" userId="c8694f89-bba4-4576-b0a8-456619ca5a8c" providerId="ADAL" clId="{FDDBFC5A-5EA9-5330-BEB8-433D7E3B4C4E}" dt="2026-04-22T06:54:47.214" v="13" actId="478"/>
+          <ac:picMkLst>
+            <pc:docMk/>
+            <pc:sldMk cId="0" sldId="266"/>
+            <ac:picMk id="3" creationId="{75CE04BD-4DF3-7B6A-8E57-577F2936668C}"/>
           </ac:picMkLst>
         </pc:picChg>
       </pc:sldChg>
       <pc:sldChg chg="modSp mod">
-        <pc:chgData name="Riccardo Berta" userId="c8694f89-bba4-4576-b0a8-456619ca5a8c" providerId="ADAL" clId="{3F77A462-6347-E641-AA99-0C769B8B031A}" dt="2022-03-11T12:13:55.107" v="34" actId="1076"/>
+        <pc:chgData name="Riccardo Berta" userId="c8694f89-bba4-4576-b0a8-456619ca5a8c" providerId="ADAL" clId="{FDDBFC5A-5EA9-5330-BEB8-433D7E3B4C4E}" dt="2026-04-22T06:04:16.720" v="1" actId="20577"/>
         <pc:sldMkLst>
           <pc:docMk/>
-          <pc:sldMk cId="0" sldId="258"/>
-        </pc:sldMkLst>
-        <pc:picChg chg="mod">
-          <ac:chgData name="Riccardo Berta" userId="c8694f89-bba4-4576-b0a8-456619ca5a8c" providerId="ADAL" clId="{3F77A462-6347-E641-AA99-0C769B8B031A}" dt="2022-03-11T12:13:55.107" v="34" actId="1076"/>
-          <ac:picMkLst>
-            <pc:docMk/>
-            <pc:sldMk cId="0" sldId="258"/>
-            <ac:picMk id="145" creationId="{00000000-0000-0000-0000-000000000000}"/>
-          </ac:picMkLst>
-        </pc:picChg>
-        <pc:picChg chg="mod">
-          <ac:chgData name="Riccardo Berta" userId="c8694f89-bba4-4576-b0a8-456619ca5a8c" providerId="ADAL" clId="{3F77A462-6347-E641-AA99-0C769B8B031A}" dt="2022-03-09T07:51:15.296" v="1"/>
-          <ac:picMkLst>
-            <pc:docMk/>
-            <pc:sldMk cId="0" sldId="258"/>
-            <ac:picMk id="146" creationId="{00000000-0000-0000-0000-000000000000}"/>
-          </ac:picMkLst>
-        </pc:picChg>
-      </pc:sldChg>
-      <pc:sldChg chg="modSp">
-        <pc:chgData name="Riccardo Berta" userId="c8694f89-bba4-4576-b0a8-456619ca5a8c" providerId="ADAL" clId="{3F77A462-6347-E641-AA99-0C769B8B031A}" dt="2022-03-09T07:51:41.496" v="3"/>
-        <pc:sldMkLst>
-          <pc:docMk/>
-          <pc:sldMk cId="0" sldId="259"/>
-        </pc:sldMkLst>
-        <pc:picChg chg="mod">
-          <ac:chgData name="Riccardo Berta" userId="c8694f89-bba4-4576-b0a8-456619ca5a8c" providerId="ADAL" clId="{3F77A462-6347-E641-AA99-0C769B8B031A}" dt="2022-03-09T07:51:41.496" v="3"/>
-          <ac:picMkLst>
-            <pc:docMk/>
-            <pc:sldMk cId="0" sldId="259"/>
-            <ac:picMk id="171" creationId="{00000000-0000-0000-0000-000000000000}"/>
-          </ac:picMkLst>
-        </pc:picChg>
-      </pc:sldChg>
-      <pc:sldChg chg="modSp mod">
-        <pc:chgData name="Riccardo Berta" userId="c8694f89-bba4-4576-b0a8-456619ca5a8c" providerId="ADAL" clId="{3F77A462-6347-E641-AA99-0C769B8B031A}" dt="2022-03-11T12:21:40.468" v="36" actId="167"/>
-        <pc:sldMkLst>
-          <pc:docMk/>
-          <pc:sldMk cId="0" sldId="260"/>
-        </pc:sldMkLst>
-        <pc:picChg chg="mod">
-          <ac:chgData name="Riccardo Berta" userId="c8694f89-bba4-4576-b0a8-456619ca5a8c" providerId="ADAL" clId="{3F77A462-6347-E641-AA99-0C769B8B031A}" dt="2022-03-11T12:21:40.468" v="36" actId="167"/>
-          <ac:picMkLst>
-            <pc:docMk/>
-            <pc:sldMk cId="0" sldId="260"/>
-            <ac:picMk id="179" creationId="{00000000-0000-0000-0000-000000000000}"/>
-          </ac:picMkLst>
-        </pc:picChg>
-        <pc:picChg chg="mod">
-          <ac:chgData name="Riccardo Berta" userId="c8694f89-bba4-4576-b0a8-456619ca5a8c" providerId="ADAL" clId="{3F77A462-6347-E641-AA99-0C769B8B031A}" dt="2022-03-09T07:52:02.933" v="4"/>
-          <ac:picMkLst>
-            <pc:docMk/>
-            <pc:sldMk cId="0" sldId="260"/>
-            <ac:picMk id="180" creationId="{00000000-0000-0000-0000-000000000000}"/>
-          </ac:picMkLst>
-        </pc:picChg>
-      </pc:sldChg>
-      <pc:sldChg chg="modSp mod">
-        <pc:chgData name="Riccardo Berta" userId="c8694f89-bba4-4576-b0a8-456619ca5a8c" providerId="ADAL" clId="{3F77A462-6347-E641-AA99-0C769B8B031A}" dt="2022-03-09T07:52:21.749" v="6"/>
-        <pc:sldMkLst>
-          <pc:docMk/>
-          <pc:sldMk cId="0" sldId="261"/>
-        </pc:sldMkLst>
-        <pc:picChg chg="mod">
-          <ac:chgData name="Riccardo Berta" userId="c8694f89-bba4-4576-b0a8-456619ca5a8c" providerId="ADAL" clId="{3F77A462-6347-E641-AA99-0C769B8B031A}" dt="2022-03-09T07:52:21.749" v="6"/>
-          <ac:picMkLst>
-            <pc:docMk/>
-            <pc:sldMk cId="0" sldId="261"/>
-            <ac:picMk id="187" creationId="{00000000-0000-0000-0000-000000000000}"/>
-          </ac:picMkLst>
-        </pc:picChg>
-      </pc:sldChg>
-      <pc:sldChg chg="modSp">
-        <pc:chgData name="Riccardo Berta" userId="c8694f89-bba4-4576-b0a8-456619ca5a8c" providerId="ADAL" clId="{3F77A462-6347-E641-AA99-0C769B8B031A}" dt="2022-03-09T07:52:39.725" v="7"/>
-        <pc:sldMkLst>
-          <pc:docMk/>
-          <pc:sldMk cId="0" sldId="262"/>
-        </pc:sldMkLst>
-        <pc:picChg chg="mod">
-          <ac:chgData name="Riccardo Berta" userId="c8694f89-bba4-4576-b0a8-456619ca5a8c" providerId="ADAL" clId="{3F77A462-6347-E641-AA99-0C769B8B031A}" dt="2022-03-09T07:52:39.725" v="7"/>
-          <ac:picMkLst>
-            <pc:docMk/>
-            <pc:sldMk cId="0" sldId="262"/>
-            <ac:picMk id="194" creationId="{00000000-0000-0000-0000-000000000000}"/>
-          </ac:picMkLst>
-        </pc:picChg>
-      </pc:sldChg>
-      <pc:sldChg chg="modSp">
-        <pc:chgData name="Riccardo Berta" userId="c8694f89-bba4-4576-b0a8-456619ca5a8c" providerId="ADAL" clId="{3F77A462-6347-E641-AA99-0C769B8B031A}" dt="2022-03-09T07:52:55.942" v="8"/>
-        <pc:sldMkLst>
-          <pc:docMk/>
-          <pc:sldMk cId="0" sldId="263"/>
-        </pc:sldMkLst>
-        <pc:picChg chg="mod">
-          <ac:chgData name="Riccardo Berta" userId="c8694f89-bba4-4576-b0a8-456619ca5a8c" providerId="ADAL" clId="{3F77A462-6347-E641-AA99-0C769B8B031A}" dt="2022-03-09T07:52:55.942" v="8"/>
-          <ac:picMkLst>
-            <pc:docMk/>
-            <pc:sldMk cId="0" sldId="263"/>
-            <ac:picMk id="201" creationId="{00000000-0000-0000-0000-000000000000}"/>
-          </ac:picMkLst>
-        </pc:picChg>
-      </pc:sldChg>
-      <pc:sldChg chg="modSp">
-        <pc:chgData name="Riccardo Berta" userId="c8694f89-bba4-4576-b0a8-456619ca5a8c" providerId="ADAL" clId="{3F77A462-6347-E641-AA99-0C769B8B031A}" dt="2022-03-09T07:53:19.757" v="9"/>
-        <pc:sldMkLst>
-          <pc:docMk/>
-          <pc:sldMk cId="0" sldId="265"/>
-        </pc:sldMkLst>
-        <pc:picChg chg="mod">
-          <ac:chgData name="Riccardo Berta" userId="c8694f89-bba4-4576-b0a8-456619ca5a8c" providerId="ADAL" clId="{3F77A462-6347-E641-AA99-0C769B8B031A}" dt="2022-03-09T07:53:19.757" v="9"/>
-          <ac:picMkLst>
-            <pc:docMk/>
-            <pc:sldMk cId="0" sldId="265"/>
-            <ac:picMk id="215" creationId="{00000000-0000-0000-0000-000000000000}"/>
-          </ac:picMkLst>
-        </pc:picChg>
-      </pc:sldChg>
-      <pc:sldChg chg="modSp">
-        <pc:chgData name="Riccardo Berta" userId="c8694f89-bba4-4576-b0a8-456619ca5a8c" providerId="ADAL" clId="{3F77A462-6347-E641-AA99-0C769B8B031A}" dt="2022-03-09T07:53:34.123" v="10"/>
-        <pc:sldMkLst>
-          <pc:docMk/>
-          <pc:sldMk cId="0" sldId="266"/>
-        </pc:sldMkLst>
-        <pc:picChg chg="mod">
-          <ac:chgData name="Riccardo Berta" userId="c8694f89-bba4-4576-b0a8-456619ca5a8c" providerId="ADAL" clId="{3F77A462-6347-E641-AA99-0C769B8B031A}" dt="2022-03-09T07:53:34.123" v="10"/>
-          <ac:picMkLst>
-            <pc:docMk/>
-            <pc:sldMk cId="0" sldId="266"/>
-            <ac:picMk id="222" creationId="{00000000-0000-0000-0000-000000000000}"/>
-          </ac:picMkLst>
-        </pc:picChg>
-      </pc:sldChg>
-      <pc:sldChg chg="modSp">
-        <pc:chgData name="Riccardo Berta" userId="c8694f89-bba4-4576-b0a8-456619ca5a8c" providerId="ADAL" clId="{3F77A462-6347-E641-AA99-0C769B8B031A}" dt="2022-03-09T07:53:50.564" v="11"/>
-        <pc:sldMkLst>
-          <pc:docMk/>
-          <pc:sldMk cId="0" sldId="267"/>
-        </pc:sldMkLst>
-        <pc:picChg chg="mod">
-          <ac:chgData name="Riccardo Berta" userId="c8694f89-bba4-4576-b0a8-456619ca5a8c" providerId="ADAL" clId="{3F77A462-6347-E641-AA99-0C769B8B031A}" dt="2022-03-09T07:53:50.564" v="11"/>
-          <ac:picMkLst>
-            <pc:docMk/>
-            <pc:sldMk cId="0" sldId="267"/>
-            <ac:picMk id="229" creationId="{00000000-0000-0000-0000-000000000000}"/>
-          </ac:picMkLst>
-        </pc:picChg>
-      </pc:sldChg>
-      <pc:sldChg chg="modSp">
-        <pc:chgData name="Riccardo Berta" userId="c8694f89-bba4-4576-b0a8-456619ca5a8c" providerId="ADAL" clId="{3F77A462-6347-E641-AA99-0C769B8B031A}" dt="2022-03-09T07:54:05.287" v="12"/>
-        <pc:sldMkLst>
-          <pc:docMk/>
-          <pc:sldMk cId="0" sldId="268"/>
-        </pc:sldMkLst>
-        <pc:picChg chg="mod">
-          <ac:chgData name="Riccardo Berta" userId="c8694f89-bba4-4576-b0a8-456619ca5a8c" providerId="ADAL" clId="{3F77A462-6347-E641-AA99-0C769B8B031A}" dt="2022-03-09T07:54:05.287" v="12"/>
-          <ac:picMkLst>
-            <pc:docMk/>
-            <pc:sldMk cId="0" sldId="268"/>
-            <ac:picMk id="236" creationId="{00000000-0000-0000-0000-000000000000}"/>
-          </ac:picMkLst>
-        </pc:picChg>
-      </pc:sldChg>
-      <pc:sldChg chg="modSp">
-        <pc:chgData name="Riccardo Berta" userId="c8694f89-bba4-4576-b0a8-456619ca5a8c" providerId="ADAL" clId="{3F77A462-6347-E641-AA99-0C769B8B031A}" dt="2022-03-09T07:54:21.879" v="13"/>
-        <pc:sldMkLst>
-          <pc:docMk/>
-          <pc:sldMk cId="0" sldId="269"/>
-        </pc:sldMkLst>
-        <pc:picChg chg="mod">
-          <ac:chgData name="Riccardo Berta" userId="c8694f89-bba4-4576-b0a8-456619ca5a8c" providerId="ADAL" clId="{3F77A462-6347-E641-AA99-0C769B8B031A}" dt="2022-03-09T07:54:21.879" v="13"/>
-          <ac:picMkLst>
-            <pc:docMk/>
-            <pc:sldMk cId="0" sldId="269"/>
-            <ac:picMk id="250" creationId="{00000000-0000-0000-0000-000000000000}"/>
-          </ac:picMkLst>
-        </pc:picChg>
-      </pc:sldChg>
-      <pc:sldChg chg="modSp mod">
-        <pc:chgData name="Riccardo Berta" userId="c8694f89-bba4-4576-b0a8-456619ca5a8c" providerId="ADAL" clId="{3F77A462-6347-E641-AA99-0C769B8B031A}" dt="2022-03-11T12:28:10.724" v="44" actId="12"/>
-        <pc:sldMkLst>
-          <pc:docMk/>
-          <pc:sldMk cId="0" sldId="270"/>
+          <pc:sldMk cId="996632380" sldId="281"/>
         </pc:sldMkLst>
         <pc:spChg chg="mod">
-          <ac:chgData name="Riccardo Berta" userId="c8694f89-bba4-4576-b0a8-456619ca5a8c" providerId="ADAL" clId="{3F77A462-6347-E641-AA99-0C769B8B031A}" dt="2022-03-11T12:28:10.724" v="44" actId="12"/>
+          <ac:chgData name="Riccardo Berta" userId="c8694f89-bba4-4576-b0a8-456619ca5a8c" providerId="ADAL" clId="{FDDBFC5A-5EA9-5330-BEB8-433D7E3B4C4E}" dt="2026-04-22T06:04:16.720" v="1" actId="20577"/>
           <ac:spMkLst>
             <pc:docMk/>
-            <pc:sldMk cId="0" sldId="270"/>
-            <ac:spMk id="256" creationId="{00000000-0000-0000-0000-000000000000}"/>
-          </ac:spMkLst>
-        </pc:spChg>
-        <pc:picChg chg="mod">
-          <ac:chgData name="Riccardo Berta" userId="c8694f89-bba4-4576-b0a8-456619ca5a8c" providerId="ADAL" clId="{3F77A462-6347-E641-AA99-0C769B8B031A}" dt="2022-03-11T12:27:30.095" v="40" actId="1076"/>
-          <ac:picMkLst>
-            <pc:docMk/>
-            <pc:sldMk cId="0" sldId="270"/>
-            <ac:picMk id="257" creationId="{00000000-0000-0000-0000-000000000000}"/>
-          </ac:picMkLst>
-        </pc:picChg>
-      </pc:sldChg>
-      <pc:sldChg chg="modSp">
-        <pc:chgData name="Riccardo Berta" userId="c8694f89-bba4-4576-b0a8-456619ca5a8c" providerId="ADAL" clId="{3F77A462-6347-E641-AA99-0C769B8B031A}" dt="2022-03-09T07:55:07.493" v="17"/>
-        <pc:sldMkLst>
-          <pc:docMk/>
-          <pc:sldMk cId="0" sldId="271"/>
-        </pc:sldMkLst>
-        <pc:picChg chg="mod">
-          <ac:chgData name="Riccardo Berta" userId="c8694f89-bba4-4576-b0a8-456619ca5a8c" providerId="ADAL" clId="{3F77A462-6347-E641-AA99-0C769B8B031A}" dt="2022-03-09T07:55:07.493" v="17"/>
-          <ac:picMkLst>
-            <pc:docMk/>
-            <pc:sldMk cId="0" sldId="271"/>
-            <ac:picMk id="264" creationId="{00000000-0000-0000-0000-000000000000}"/>
-          </ac:picMkLst>
-        </pc:picChg>
-      </pc:sldChg>
-      <pc:sldChg chg="modSp">
-        <pc:chgData name="Riccardo Berta" userId="c8694f89-bba4-4576-b0a8-456619ca5a8c" providerId="ADAL" clId="{3F77A462-6347-E641-AA99-0C769B8B031A}" dt="2022-03-09T07:55:31.746" v="18"/>
-        <pc:sldMkLst>
-          <pc:docMk/>
-          <pc:sldMk cId="0" sldId="272"/>
-        </pc:sldMkLst>
-        <pc:picChg chg="mod">
-          <ac:chgData name="Riccardo Berta" userId="c8694f89-bba4-4576-b0a8-456619ca5a8c" providerId="ADAL" clId="{3F77A462-6347-E641-AA99-0C769B8B031A}" dt="2022-03-09T07:55:31.746" v="18"/>
-          <ac:picMkLst>
-            <pc:docMk/>
-            <pc:sldMk cId="0" sldId="272"/>
-            <ac:picMk id="272" creationId="{00000000-0000-0000-0000-000000000000}"/>
-          </ac:picMkLst>
-        </pc:picChg>
-      </pc:sldChg>
-      <pc:sldChg chg="modSp">
-        <pc:chgData name="Riccardo Berta" userId="c8694f89-bba4-4576-b0a8-456619ca5a8c" providerId="ADAL" clId="{3F77A462-6347-E641-AA99-0C769B8B031A}" dt="2022-03-09T07:58:55.124" v="22"/>
-        <pc:sldMkLst>
-          <pc:docMk/>
-          <pc:sldMk cId="0" sldId="273"/>
-        </pc:sldMkLst>
-        <pc:picChg chg="mod">
-          <ac:chgData name="Riccardo Berta" userId="c8694f89-bba4-4576-b0a8-456619ca5a8c" providerId="ADAL" clId="{3F77A462-6347-E641-AA99-0C769B8B031A}" dt="2022-03-09T07:58:55.124" v="22"/>
-          <ac:picMkLst>
-            <pc:docMk/>
-            <pc:sldMk cId="0" sldId="273"/>
-            <ac:picMk id="283" creationId="{00000000-0000-0000-0000-000000000000}"/>
-          </ac:picMkLst>
-        </pc:picChg>
-      </pc:sldChg>
-      <pc:sldChg chg="modSp">
-        <pc:chgData name="Riccardo Berta" userId="c8694f89-bba4-4576-b0a8-456619ca5a8c" providerId="ADAL" clId="{3F77A462-6347-E641-AA99-0C769B8B031A}" dt="2022-03-09T07:57:44.129" v="19"/>
-        <pc:sldMkLst>
-          <pc:docMk/>
-          <pc:sldMk cId="0" sldId="274"/>
-        </pc:sldMkLst>
-        <pc:picChg chg="mod">
-          <ac:chgData name="Riccardo Berta" userId="c8694f89-bba4-4576-b0a8-456619ca5a8c" providerId="ADAL" clId="{3F77A462-6347-E641-AA99-0C769B8B031A}" dt="2022-03-09T07:57:44.129" v="19"/>
-          <ac:picMkLst>
-            <pc:docMk/>
-            <pc:sldMk cId="0" sldId="274"/>
-            <ac:picMk id="296" creationId="{00000000-0000-0000-0000-000000000000}"/>
-          </ac:picMkLst>
-        </pc:picChg>
-      </pc:sldChg>
-      <pc:sldChg chg="modSp">
-        <pc:chgData name="Riccardo Berta" userId="c8694f89-bba4-4576-b0a8-456619ca5a8c" providerId="ADAL" clId="{3F77A462-6347-E641-AA99-0C769B8B031A}" dt="2022-03-09T07:57:58.927" v="20"/>
-        <pc:sldMkLst>
-          <pc:docMk/>
-          <pc:sldMk cId="0" sldId="275"/>
-        </pc:sldMkLst>
-        <pc:picChg chg="mod">
-          <ac:chgData name="Riccardo Berta" userId="c8694f89-bba4-4576-b0a8-456619ca5a8c" providerId="ADAL" clId="{3F77A462-6347-E641-AA99-0C769B8B031A}" dt="2022-03-09T07:57:58.927" v="20"/>
-          <ac:picMkLst>
-            <pc:docMk/>
-            <pc:sldMk cId="0" sldId="275"/>
-            <ac:picMk id="306" creationId="{00000000-0000-0000-0000-000000000000}"/>
-          </ac:picMkLst>
-        </pc:picChg>
-      </pc:sldChg>
-      <pc:sldChg chg="modSp">
-        <pc:chgData name="Riccardo Berta" userId="c8694f89-bba4-4576-b0a8-456619ca5a8c" providerId="ADAL" clId="{3F77A462-6347-E641-AA99-0C769B8B031A}" dt="2022-03-09T07:58:20.112" v="21"/>
-        <pc:sldMkLst>
-          <pc:docMk/>
-          <pc:sldMk cId="0" sldId="276"/>
-        </pc:sldMkLst>
-        <pc:picChg chg="mod">
-          <ac:chgData name="Riccardo Berta" userId="c8694f89-bba4-4576-b0a8-456619ca5a8c" providerId="ADAL" clId="{3F77A462-6347-E641-AA99-0C769B8B031A}" dt="2022-03-09T07:58:20.112" v="21"/>
-          <ac:picMkLst>
-            <pc:docMk/>
-            <pc:sldMk cId="0" sldId="276"/>
-            <ac:picMk id="317" creationId="{00000000-0000-0000-0000-000000000000}"/>
-          </ac:picMkLst>
-        </pc:picChg>
-      </pc:sldChg>
-      <pc:sldChg chg="modSp mod">
-        <pc:chgData name="Riccardo Berta" userId="c8694f89-bba4-4576-b0a8-456619ca5a8c" providerId="ADAL" clId="{3F77A462-6347-E641-AA99-0C769B8B031A}" dt="2022-03-16T09:45:29.960" v="220" actId="20577"/>
-        <pc:sldMkLst>
-          <pc:docMk/>
-          <pc:sldMk cId="0" sldId="277"/>
-        </pc:sldMkLst>
-        <pc:spChg chg="mod">
-          <ac:chgData name="Riccardo Berta" userId="c8694f89-bba4-4576-b0a8-456619ca5a8c" providerId="ADAL" clId="{3F77A462-6347-E641-AA99-0C769B8B031A}" dt="2022-03-16T09:45:29.960" v="220" actId="20577"/>
-          <ac:spMkLst>
-            <pc:docMk/>
-            <pc:sldMk cId="0" sldId="277"/>
-            <ac:spMk id="323" creationId="{00000000-0000-0000-0000-000000000000}"/>
-          </ac:spMkLst>
-        </pc:spChg>
-      </pc:sldChg>
-    </pc:docChg>
-  </pc:docChgLst>
-  <pc:docChgLst>
-    <pc:chgData name="Riccardo Berta" userId="c8694f89-bba4-4576-b0a8-456619ca5a8c" providerId="ADAL" clId="{97383AD6-40CD-6A43-8934-40A237B55ECF}"/>
-    <pc:docChg chg="undo custSel modSld">
-      <pc:chgData name="Riccardo Berta" userId="c8694f89-bba4-4576-b0a8-456619ca5a8c" providerId="ADAL" clId="{97383AD6-40CD-6A43-8934-40A237B55ECF}" dt="2023-03-23T09:52:06.743" v="559" actId="1076"/>
-      <pc:docMkLst>
-        <pc:docMk/>
-      </pc:docMkLst>
-      <pc:sldChg chg="addSp modSp mod">
-        <pc:chgData name="Riccardo Berta" userId="c8694f89-bba4-4576-b0a8-456619ca5a8c" providerId="ADAL" clId="{97383AD6-40CD-6A43-8934-40A237B55ECF}" dt="2023-03-23T09:52:06.743" v="559" actId="1076"/>
-        <pc:sldMkLst>
-          <pc:docMk/>
-          <pc:sldMk cId="0" sldId="256"/>
-        </pc:sldMkLst>
-        <pc:spChg chg="add mod">
-          <ac:chgData name="Riccardo Berta" userId="c8694f89-bba4-4576-b0a8-456619ca5a8c" providerId="ADAL" clId="{97383AD6-40CD-6A43-8934-40A237B55ECF}" dt="2023-03-23T08:43:30.623" v="4" actId="1076"/>
-          <ac:spMkLst>
-            <pc:docMk/>
-            <pc:sldMk cId="0" sldId="256"/>
-            <ac:spMk id="2" creationId="{891E7848-4BFF-DFA1-4A13-66755AC81076}"/>
-          </ac:spMkLst>
-        </pc:spChg>
-        <pc:spChg chg="add mod">
-          <ac:chgData name="Riccardo Berta" userId="c8694f89-bba4-4576-b0a8-456619ca5a8c" providerId="ADAL" clId="{97383AD6-40CD-6A43-8934-40A237B55ECF}" dt="2023-03-23T08:43:36.377" v="7" actId="14100"/>
-          <ac:spMkLst>
-            <pc:docMk/>
-            <pc:sldMk cId="0" sldId="256"/>
-            <ac:spMk id="3" creationId="{D597E679-6D68-6BFE-9C79-05B3DF035F6A}"/>
-          </ac:spMkLst>
-        </pc:spChg>
-        <pc:spChg chg="mod">
-          <ac:chgData name="Riccardo Berta" userId="c8694f89-bba4-4576-b0a8-456619ca5a8c" providerId="ADAL" clId="{97383AD6-40CD-6A43-8934-40A237B55ECF}" dt="2023-03-23T09:52:06.743" v="559" actId="1076"/>
-          <ac:spMkLst>
-            <pc:docMk/>
-            <pc:sldMk cId="0" sldId="256"/>
-            <ac:spMk id="115" creationId="{00000000-0000-0000-0000-000000000000}"/>
-          </ac:spMkLst>
-        </pc:spChg>
-        <pc:spChg chg="mod">
-          <ac:chgData name="Riccardo Berta" userId="c8694f89-bba4-4576-b0a8-456619ca5a8c" providerId="ADAL" clId="{97383AD6-40CD-6A43-8934-40A237B55ECF}" dt="2023-03-23T08:43:25.869" v="2" actId="1076"/>
-          <ac:spMkLst>
-            <pc:docMk/>
-            <pc:sldMk cId="0" sldId="256"/>
-            <ac:spMk id="131" creationId="{00000000-0000-0000-0000-000000000000}"/>
-          </ac:spMkLst>
-        </pc:spChg>
-      </pc:sldChg>
-      <pc:sldChg chg="modSp mod">
-        <pc:chgData name="Riccardo Berta" userId="c8694f89-bba4-4576-b0a8-456619ca5a8c" providerId="ADAL" clId="{97383AD6-40CD-6A43-8934-40A237B55ECF}" dt="2023-03-23T08:46:16.316" v="93" actId="113"/>
-        <pc:sldMkLst>
-          <pc:docMk/>
-          <pc:sldMk cId="0" sldId="257"/>
-        </pc:sldMkLst>
-        <pc:spChg chg="mod">
-          <ac:chgData name="Riccardo Berta" userId="c8694f89-bba4-4576-b0a8-456619ca5a8c" providerId="ADAL" clId="{97383AD6-40CD-6A43-8934-40A237B55ECF}" dt="2023-03-23T08:46:16.316" v="93" actId="113"/>
-          <ac:spMkLst>
-            <pc:docMk/>
-            <pc:sldMk cId="0" sldId="257"/>
-            <ac:spMk id="137" creationId="{00000000-0000-0000-0000-000000000000}"/>
-          </ac:spMkLst>
-        </pc:spChg>
-        <pc:picChg chg="mod">
-          <ac:chgData name="Riccardo Berta" userId="c8694f89-bba4-4576-b0a8-456619ca5a8c" providerId="ADAL" clId="{97383AD6-40CD-6A43-8934-40A237B55ECF}" dt="2023-03-23T08:44:07.391" v="8"/>
-          <ac:picMkLst>
-            <pc:docMk/>
-            <pc:sldMk cId="0" sldId="257"/>
-            <ac:picMk id="138" creationId="{00000000-0000-0000-0000-000000000000}"/>
-          </ac:picMkLst>
-        </pc:picChg>
-        <pc:picChg chg="mod">
-          <ac:chgData name="Riccardo Berta" userId="c8694f89-bba4-4576-b0a8-456619ca5a8c" providerId="ADAL" clId="{97383AD6-40CD-6A43-8934-40A237B55ECF}" dt="2023-03-23T08:44:55.188" v="34" actId="1076"/>
-          <ac:picMkLst>
-            <pc:docMk/>
-            <pc:sldMk cId="0" sldId="257"/>
-            <ac:picMk id="1026" creationId="{C8FFA10B-2EBE-A649-BE34-AB2456924AC7}"/>
-          </ac:picMkLst>
-        </pc:picChg>
-      </pc:sldChg>
-      <pc:sldChg chg="modSp mod">
-        <pc:chgData name="Riccardo Berta" userId="c8694f89-bba4-4576-b0a8-456619ca5a8c" providerId="ADAL" clId="{97383AD6-40CD-6A43-8934-40A237B55ECF}" dt="2023-03-23T08:47:49.392" v="106" actId="1076"/>
-        <pc:sldMkLst>
-          <pc:docMk/>
-          <pc:sldMk cId="0" sldId="258"/>
-        </pc:sldMkLst>
-        <pc:spChg chg="mod">
-          <ac:chgData name="Riccardo Berta" userId="c8694f89-bba4-4576-b0a8-456619ca5a8c" providerId="ADAL" clId="{97383AD6-40CD-6A43-8934-40A237B55ECF}" dt="2023-03-23T08:47:15.591" v="104" actId="20577"/>
-          <ac:spMkLst>
-            <pc:docMk/>
-            <pc:sldMk cId="0" sldId="258"/>
-            <ac:spMk id="144" creationId="{00000000-0000-0000-0000-000000000000}"/>
-          </ac:spMkLst>
-        </pc:spChg>
-        <pc:picChg chg="mod">
-          <ac:chgData name="Riccardo Berta" userId="c8694f89-bba4-4576-b0a8-456619ca5a8c" providerId="ADAL" clId="{97383AD6-40CD-6A43-8934-40A237B55ECF}" dt="2023-03-23T08:47:49.392" v="106" actId="1076"/>
-          <ac:picMkLst>
-            <pc:docMk/>
-            <pc:sldMk cId="0" sldId="258"/>
-            <ac:picMk id="145" creationId="{00000000-0000-0000-0000-000000000000}"/>
-          </ac:picMkLst>
-        </pc:picChg>
-        <pc:picChg chg="mod">
-          <ac:chgData name="Riccardo Berta" userId="c8694f89-bba4-4576-b0a8-456619ca5a8c" providerId="ADAL" clId="{97383AD6-40CD-6A43-8934-40A237B55ECF}" dt="2023-03-23T08:47:13.420" v="103"/>
-          <ac:picMkLst>
-            <pc:docMk/>
-            <pc:sldMk cId="0" sldId="258"/>
-            <ac:picMk id="146" creationId="{00000000-0000-0000-0000-000000000000}"/>
-          </ac:picMkLst>
-        </pc:picChg>
-      </pc:sldChg>
-      <pc:sldChg chg="modSp">
-        <pc:chgData name="Riccardo Berta" userId="c8694f89-bba4-4576-b0a8-456619ca5a8c" providerId="ADAL" clId="{97383AD6-40CD-6A43-8934-40A237B55ECF}" dt="2023-03-23T08:48:12.844" v="107"/>
-        <pc:sldMkLst>
-          <pc:docMk/>
-          <pc:sldMk cId="0" sldId="259"/>
-        </pc:sldMkLst>
-        <pc:picChg chg="mod">
-          <ac:chgData name="Riccardo Berta" userId="c8694f89-bba4-4576-b0a8-456619ca5a8c" providerId="ADAL" clId="{97383AD6-40CD-6A43-8934-40A237B55ECF}" dt="2023-03-23T08:48:12.844" v="107"/>
-          <ac:picMkLst>
-            <pc:docMk/>
-            <pc:sldMk cId="0" sldId="259"/>
-            <ac:picMk id="171" creationId="{00000000-0000-0000-0000-000000000000}"/>
-          </ac:picMkLst>
-        </pc:picChg>
-      </pc:sldChg>
-      <pc:sldChg chg="modSp mod">
-        <pc:chgData name="Riccardo Berta" userId="c8694f89-bba4-4576-b0a8-456619ca5a8c" providerId="ADAL" clId="{97383AD6-40CD-6A43-8934-40A237B55ECF}" dt="2023-03-23T08:49:11.996" v="125"/>
-        <pc:sldMkLst>
-          <pc:docMk/>
-          <pc:sldMk cId="0" sldId="260"/>
-        </pc:sldMkLst>
-        <pc:spChg chg="mod">
-          <ac:chgData name="Riccardo Berta" userId="c8694f89-bba4-4576-b0a8-456619ca5a8c" providerId="ADAL" clId="{97383AD6-40CD-6A43-8934-40A237B55ECF}" dt="2023-03-23T08:48:45.127" v="116" actId="20577"/>
-          <ac:spMkLst>
-            <pc:docMk/>
-            <pc:sldMk cId="0" sldId="260"/>
-            <ac:spMk id="176" creationId="{00000000-0000-0000-0000-000000000000}"/>
-          </ac:spMkLst>
-        </pc:spChg>
-        <pc:picChg chg="mod">
-          <ac:chgData name="Riccardo Berta" userId="c8694f89-bba4-4576-b0a8-456619ca5a8c" providerId="ADAL" clId="{97383AD6-40CD-6A43-8934-40A237B55ECF}" dt="2023-03-23T08:48:39.347" v="112" actId="1076"/>
-          <ac:picMkLst>
-            <pc:docMk/>
-            <pc:sldMk cId="0" sldId="260"/>
-            <ac:picMk id="178" creationId="{00000000-0000-0000-0000-000000000000}"/>
-          </ac:picMkLst>
-        </pc:picChg>
-        <pc:picChg chg="mod">
-          <ac:chgData name="Riccardo Berta" userId="c8694f89-bba4-4576-b0a8-456619ca5a8c" providerId="ADAL" clId="{97383AD6-40CD-6A43-8934-40A237B55ECF}" dt="2023-03-23T08:49:11.996" v="125"/>
-          <ac:picMkLst>
-            <pc:docMk/>
-            <pc:sldMk cId="0" sldId="260"/>
-            <ac:picMk id="180" creationId="{00000000-0000-0000-0000-000000000000}"/>
-          </ac:picMkLst>
-        </pc:picChg>
-      </pc:sldChg>
-      <pc:sldChg chg="modSp mod">
-        <pc:chgData name="Riccardo Berta" userId="c8694f89-bba4-4576-b0a8-456619ca5a8c" providerId="ADAL" clId="{97383AD6-40CD-6A43-8934-40A237B55ECF}" dt="2023-03-23T08:50:19.531" v="133" actId="14100"/>
-        <pc:sldMkLst>
-          <pc:docMk/>
-          <pc:sldMk cId="0" sldId="261"/>
-        </pc:sldMkLst>
-        <pc:spChg chg="mod">
-          <ac:chgData name="Riccardo Berta" userId="c8694f89-bba4-4576-b0a8-456619ca5a8c" providerId="ADAL" clId="{97383AD6-40CD-6A43-8934-40A237B55ECF}" dt="2023-03-23T08:50:19.531" v="133" actId="14100"/>
-          <ac:spMkLst>
-            <pc:docMk/>
-            <pc:sldMk cId="0" sldId="261"/>
-            <ac:spMk id="186" creationId="{00000000-0000-0000-0000-000000000000}"/>
-          </ac:spMkLst>
-        </pc:spChg>
-        <pc:picChg chg="mod">
-          <ac:chgData name="Riccardo Berta" userId="c8694f89-bba4-4576-b0a8-456619ca5a8c" providerId="ADAL" clId="{97383AD6-40CD-6A43-8934-40A237B55ECF}" dt="2023-03-23T08:50:03.798" v="130" actId="1035"/>
-          <ac:picMkLst>
-            <pc:docMk/>
-            <pc:sldMk cId="0" sldId="261"/>
-            <ac:picMk id="187" creationId="{00000000-0000-0000-0000-000000000000}"/>
-          </ac:picMkLst>
-        </pc:picChg>
-      </pc:sldChg>
-      <pc:sldChg chg="modSp mod">
-        <pc:chgData name="Riccardo Berta" userId="c8694f89-bba4-4576-b0a8-456619ca5a8c" providerId="ADAL" clId="{97383AD6-40CD-6A43-8934-40A237B55ECF}" dt="2023-03-23T08:51:15.216" v="138" actId="113"/>
-        <pc:sldMkLst>
-          <pc:docMk/>
-          <pc:sldMk cId="0" sldId="262"/>
-        </pc:sldMkLst>
-        <pc:spChg chg="mod">
-          <ac:chgData name="Riccardo Berta" userId="c8694f89-bba4-4576-b0a8-456619ca5a8c" providerId="ADAL" clId="{97383AD6-40CD-6A43-8934-40A237B55ECF}" dt="2023-03-23T08:51:15.216" v="138" actId="113"/>
-          <ac:spMkLst>
-            <pc:docMk/>
-            <pc:sldMk cId="0" sldId="262"/>
-            <ac:spMk id="193" creationId="{00000000-0000-0000-0000-000000000000}"/>
-          </ac:spMkLst>
-        </pc:spChg>
-        <pc:picChg chg="mod">
-          <ac:chgData name="Riccardo Berta" userId="c8694f89-bba4-4576-b0a8-456619ca5a8c" providerId="ADAL" clId="{97383AD6-40CD-6A43-8934-40A237B55ECF}" dt="2023-03-23T08:50:40.431" v="134"/>
-          <ac:picMkLst>
-            <pc:docMk/>
-            <pc:sldMk cId="0" sldId="262"/>
-            <ac:picMk id="194" creationId="{00000000-0000-0000-0000-000000000000}"/>
-          </ac:picMkLst>
-        </pc:picChg>
-      </pc:sldChg>
-      <pc:sldChg chg="modSp mod">
-        <pc:chgData name="Riccardo Berta" userId="c8694f89-bba4-4576-b0a8-456619ca5a8c" providerId="ADAL" clId="{97383AD6-40CD-6A43-8934-40A237B55ECF}" dt="2023-03-23T08:52:49.377" v="170" actId="5793"/>
-        <pc:sldMkLst>
-          <pc:docMk/>
-          <pc:sldMk cId="0" sldId="263"/>
-        </pc:sldMkLst>
-        <pc:spChg chg="mod">
-          <ac:chgData name="Riccardo Berta" userId="c8694f89-bba4-4576-b0a8-456619ca5a8c" providerId="ADAL" clId="{97383AD6-40CD-6A43-8934-40A237B55ECF}" dt="2023-03-23T08:52:49.377" v="170" actId="5793"/>
-          <ac:spMkLst>
-            <pc:docMk/>
-            <pc:sldMk cId="0" sldId="263"/>
-            <ac:spMk id="200" creationId="{00000000-0000-0000-0000-000000000000}"/>
-          </ac:spMkLst>
-        </pc:spChg>
-        <pc:picChg chg="mod">
-          <ac:chgData name="Riccardo Berta" userId="c8694f89-bba4-4576-b0a8-456619ca5a8c" providerId="ADAL" clId="{97383AD6-40CD-6A43-8934-40A237B55ECF}" dt="2023-03-23T08:51:41.044" v="139"/>
-          <ac:picMkLst>
-            <pc:docMk/>
-            <pc:sldMk cId="0" sldId="263"/>
-            <ac:picMk id="201" creationId="{00000000-0000-0000-0000-000000000000}"/>
-          </ac:picMkLst>
-        </pc:picChg>
-      </pc:sldChg>
-      <pc:sldChg chg="modSp mod">
-        <pc:chgData name="Riccardo Berta" userId="c8694f89-bba4-4576-b0a8-456619ca5a8c" providerId="ADAL" clId="{97383AD6-40CD-6A43-8934-40A237B55ECF}" dt="2023-03-23T09:33:07.016" v="190" actId="20577"/>
-        <pc:sldMkLst>
-          <pc:docMk/>
-          <pc:sldMk cId="0" sldId="264"/>
-        </pc:sldMkLst>
-        <pc:spChg chg="mod">
-          <ac:chgData name="Riccardo Berta" userId="c8694f89-bba4-4576-b0a8-456619ca5a8c" providerId="ADAL" clId="{97383AD6-40CD-6A43-8934-40A237B55ECF}" dt="2023-03-23T09:33:07.016" v="190" actId="20577"/>
-          <ac:spMkLst>
-            <pc:docMk/>
-            <pc:sldMk cId="0" sldId="264"/>
-            <ac:spMk id="207" creationId="{00000000-0000-0000-0000-000000000000}"/>
-          </ac:spMkLst>
-        </pc:spChg>
-      </pc:sldChg>
-      <pc:sldChg chg="modSp">
-        <pc:chgData name="Riccardo Berta" userId="c8694f89-bba4-4576-b0a8-456619ca5a8c" providerId="ADAL" clId="{97383AD6-40CD-6A43-8934-40A237B55ECF}" dt="2023-03-23T09:33:28.864" v="191"/>
-        <pc:sldMkLst>
-          <pc:docMk/>
-          <pc:sldMk cId="0" sldId="265"/>
-        </pc:sldMkLst>
-        <pc:picChg chg="mod">
-          <ac:chgData name="Riccardo Berta" userId="c8694f89-bba4-4576-b0a8-456619ca5a8c" providerId="ADAL" clId="{97383AD6-40CD-6A43-8934-40A237B55ECF}" dt="2023-03-23T09:33:28.864" v="191"/>
-          <ac:picMkLst>
-            <pc:docMk/>
-            <pc:sldMk cId="0" sldId="265"/>
-            <ac:picMk id="215" creationId="{00000000-0000-0000-0000-000000000000}"/>
-          </ac:picMkLst>
-        </pc:picChg>
-      </pc:sldChg>
-      <pc:sldChg chg="modSp mod">
-        <pc:chgData name="Riccardo Berta" userId="c8694f89-bba4-4576-b0a8-456619ca5a8c" providerId="ADAL" clId="{97383AD6-40CD-6A43-8934-40A237B55ECF}" dt="2023-03-23T09:34:32.595" v="211" actId="1036"/>
-        <pc:sldMkLst>
-          <pc:docMk/>
-          <pc:sldMk cId="0" sldId="266"/>
-        </pc:sldMkLst>
-        <pc:spChg chg="mod">
-          <ac:chgData name="Riccardo Berta" userId="c8694f89-bba4-4576-b0a8-456619ca5a8c" providerId="ADAL" clId="{97383AD6-40CD-6A43-8934-40A237B55ECF}" dt="2023-03-23T09:34:32.595" v="211" actId="1036"/>
-          <ac:spMkLst>
-            <pc:docMk/>
-            <pc:sldMk cId="0" sldId="266"/>
-            <ac:spMk id="221" creationId="{00000000-0000-0000-0000-000000000000}"/>
-          </ac:spMkLst>
-        </pc:spChg>
-        <pc:picChg chg="mod">
-          <ac:chgData name="Riccardo Berta" userId="c8694f89-bba4-4576-b0a8-456619ca5a8c" providerId="ADAL" clId="{97383AD6-40CD-6A43-8934-40A237B55ECF}" dt="2023-03-23T09:33:54.131" v="197"/>
-          <ac:picMkLst>
-            <pc:docMk/>
-            <pc:sldMk cId="0" sldId="266"/>
-            <ac:picMk id="222" creationId="{00000000-0000-0000-0000-000000000000}"/>
-          </ac:picMkLst>
-        </pc:picChg>
-      </pc:sldChg>
-      <pc:sldChg chg="modSp mod">
-        <pc:chgData name="Riccardo Berta" userId="c8694f89-bba4-4576-b0a8-456619ca5a8c" providerId="ADAL" clId="{97383AD6-40CD-6A43-8934-40A237B55ECF}" dt="2023-03-23T09:35:21.321" v="218" actId="14100"/>
-        <pc:sldMkLst>
-          <pc:docMk/>
-          <pc:sldMk cId="0" sldId="267"/>
-        </pc:sldMkLst>
-        <pc:spChg chg="mod">
-          <ac:chgData name="Riccardo Berta" userId="c8694f89-bba4-4576-b0a8-456619ca5a8c" providerId="ADAL" clId="{97383AD6-40CD-6A43-8934-40A237B55ECF}" dt="2023-03-23T09:35:21.321" v="218" actId="14100"/>
-          <ac:spMkLst>
-            <pc:docMk/>
-            <pc:sldMk cId="0" sldId="267"/>
-            <ac:spMk id="228" creationId="{00000000-0000-0000-0000-000000000000}"/>
-          </ac:spMkLst>
-        </pc:spChg>
-        <pc:picChg chg="mod">
-          <ac:chgData name="Riccardo Berta" userId="c8694f89-bba4-4576-b0a8-456619ca5a8c" providerId="ADAL" clId="{97383AD6-40CD-6A43-8934-40A237B55ECF}" dt="2023-03-23T09:34:54.536" v="212"/>
-          <ac:picMkLst>
-            <pc:docMk/>
-            <pc:sldMk cId="0" sldId="267"/>
-            <ac:picMk id="229" creationId="{00000000-0000-0000-0000-000000000000}"/>
-          </ac:picMkLst>
-        </pc:picChg>
-      </pc:sldChg>
-      <pc:sldChg chg="modSp mod">
-        <pc:chgData name="Riccardo Berta" userId="c8694f89-bba4-4576-b0a8-456619ca5a8c" providerId="ADAL" clId="{97383AD6-40CD-6A43-8934-40A237B55ECF}" dt="2023-03-23T09:36:43.888" v="243" actId="14100"/>
-        <pc:sldMkLst>
-          <pc:docMk/>
-          <pc:sldMk cId="0" sldId="268"/>
-        </pc:sldMkLst>
-        <pc:spChg chg="mod">
-          <ac:chgData name="Riccardo Berta" userId="c8694f89-bba4-4576-b0a8-456619ca5a8c" providerId="ADAL" clId="{97383AD6-40CD-6A43-8934-40A237B55ECF}" dt="2023-03-23T09:36:43.888" v="243" actId="14100"/>
-          <ac:spMkLst>
-            <pc:docMk/>
-            <pc:sldMk cId="0" sldId="268"/>
-            <ac:spMk id="235" creationId="{00000000-0000-0000-0000-000000000000}"/>
-          </ac:spMkLst>
-        </pc:spChg>
-        <pc:picChg chg="mod">
-          <ac:chgData name="Riccardo Berta" userId="c8694f89-bba4-4576-b0a8-456619ca5a8c" providerId="ADAL" clId="{97383AD6-40CD-6A43-8934-40A237B55ECF}" dt="2023-03-23T09:35:43.172" v="219"/>
-          <ac:picMkLst>
-            <pc:docMk/>
-            <pc:sldMk cId="0" sldId="268"/>
-            <ac:picMk id="236" creationId="{00000000-0000-0000-0000-000000000000}"/>
-          </ac:picMkLst>
-        </pc:picChg>
-      </pc:sldChg>
-      <pc:sldChg chg="addSp modSp mod">
-        <pc:chgData name="Riccardo Berta" userId="c8694f89-bba4-4576-b0a8-456619ca5a8c" providerId="ADAL" clId="{97383AD6-40CD-6A43-8934-40A237B55ECF}" dt="2023-03-23T09:38:46.739" v="267" actId="14100"/>
-        <pc:sldMkLst>
-          <pc:docMk/>
-          <pc:sldMk cId="0" sldId="269"/>
-        </pc:sldMkLst>
-        <pc:spChg chg="mod">
-          <ac:chgData name="Riccardo Berta" userId="c8694f89-bba4-4576-b0a8-456619ca5a8c" providerId="ADAL" clId="{97383AD6-40CD-6A43-8934-40A237B55ECF}" dt="2023-03-23T09:38:46.739" v="267" actId="14100"/>
-          <ac:spMkLst>
-            <pc:docMk/>
-            <pc:sldMk cId="0" sldId="269"/>
-            <ac:spMk id="242" creationId="{00000000-0000-0000-0000-000000000000}"/>
-          </ac:spMkLst>
-        </pc:spChg>
-        <pc:spChg chg="mod">
-          <ac:chgData name="Riccardo Berta" userId="c8694f89-bba4-4576-b0a8-456619ca5a8c" providerId="ADAL" clId="{97383AD6-40CD-6A43-8934-40A237B55ECF}" dt="2023-03-23T09:37:59.477" v="254" actId="164"/>
-          <ac:spMkLst>
-            <pc:docMk/>
-            <pc:sldMk cId="0" sldId="269"/>
-            <ac:spMk id="244" creationId="{00000000-0000-0000-0000-000000000000}"/>
-          </ac:spMkLst>
-        </pc:spChg>
-        <pc:spChg chg="mod">
-          <ac:chgData name="Riccardo Berta" userId="c8694f89-bba4-4576-b0a8-456619ca5a8c" providerId="ADAL" clId="{97383AD6-40CD-6A43-8934-40A237B55ECF}" dt="2023-03-23T09:37:59.477" v="254" actId="164"/>
-          <ac:spMkLst>
-            <pc:docMk/>
-            <pc:sldMk cId="0" sldId="269"/>
-            <ac:spMk id="246" creationId="{00000000-0000-0000-0000-000000000000}"/>
-          </ac:spMkLst>
-        </pc:spChg>
-        <pc:spChg chg="mod">
-          <ac:chgData name="Riccardo Berta" userId="c8694f89-bba4-4576-b0a8-456619ca5a8c" providerId="ADAL" clId="{97383AD6-40CD-6A43-8934-40A237B55ECF}" dt="2023-03-23T09:38:38.782" v="266" actId="1076"/>
-          <ac:spMkLst>
-            <pc:docMk/>
-            <pc:sldMk cId="0" sldId="269"/>
-            <ac:spMk id="248" creationId="{00000000-0000-0000-0000-000000000000}"/>
-          </ac:spMkLst>
-        </pc:spChg>
-        <pc:grpChg chg="add mod">
-          <ac:chgData name="Riccardo Berta" userId="c8694f89-bba4-4576-b0a8-456619ca5a8c" providerId="ADAL" clId="{97383AD6-40CD-6A43-8934-40A237B55ECF}" dt="2023-03-23T09:38:05.772" v="265" actId="1036"/>
-          <ac:grpSpMkLst>
-            <pc:docMk/>
-            <pc:sldMk cId="0" sldId="269"/>
-            <ac:grpSpMk id="2" creationId="{79B240CD-B1CE-0067-9329-F6FC3D9C6D78}"/>
-          </ac:grpSpMkLst>
-        </pc:grpChg>
-        <pc:picChg chg="mod">
-          <ac:chgData name="Riccardo Berta" userId="c8694f89-bba4-4576-b0a8-456619ca5a8c" providerId="ADAL" clId="{97383AD6-40CD-6A43-8934-40A237B55ECF}" dt="2023-03-23T09:37:10.829" v="244"/>
-          <ac:picMkLst>
-            <pc:docMk/>
-            <pc:sldMk cId="0" sldId="269"/>
-            <ac:picMk id="250" creationId="{00000000-0000-0000-0000-000000000000}"/>
-          </ac:picMkLst>
-        </pc:picChg>
-        <pc:cxnChg chg="mod">
-          <ac:chgData name="Riccardo Berta" userId="c8694f89-bba4-4576-b0a8-456619ca5a8c" providerId="ADAL" clId="{97383AD6-40CD-6A43-8934-40A237B55ECF}" dt="2023-03-23T09:37:59.477" v="254" actId="164"/>
-          <ac:cxnSpMkLst>
-            <pc:docMk/>
-            <pc:sldMk cId="0" sldId="269"/>
-            <ac:cxnSpMk id="243" creationId="{00000000-0000-0000-0000-000000000000}"/>
-          </ac:cxnSpMkLst>
-        </pc:cxnChg>
-        <pc:cxnChg chg="mod">
-          <ac:chgData name="Riccardo Berta" userId="c8694f89-bba4-4576-b0a8-456619ca5a8c" providerId="ADAL" clId="{97383AD6-40CD-6A43-8934-40A237B55ECF}" dt="2023-03-23T09:37:59.477" v="254" actId="164"/>
-          <ac:cxnSpMkLst>
-            <pc:docMk/>
-            <pc:sldMk cId="0" sldId="269"/>
-            <ac:cxnSpMk id="245" creationId="{00000000-0000-0000-0000-000000000000}"/>
-          </ac:cxnSpMkLst>
-        </pc:cxnChg>
-        <pc:cxnChg chg="mod">
-          <ac:chgData name="Riccardo Berta" userId="c8694f89-bba4-4576-b0a8-456619ca5a8c" providerId="ADAL" clId="{97383AD6-40CD-6A43-8934-40A237B55ECF}" dt="2023-03-23T09:37:59.477" v="254" actId="164"/>
-          <ac:cxnSpMkLst>
-            <pc:docMk/>
-            <pc:sldMk cId="0" sldId="269"/>
-            <ac:cxnSpMk id="247" creationId="{00000000-0000-0000-0000-000000000000}"/>
-          </ac:cxnSpMkLst>
-        </pc:cxnChg>
-        <pc:cxnChg chg="mod">
-          <ac:chgData name="Riccardo Berta" userId="c8694f89-bba4-4576-b0a8-456619ca5a8c" providerId="ADAL" clId="{97383AD6-40CD-6A43-8934-40A237B55ECF}" dt="2023-03-23T09:38:38.782" v="266" actId="1076"/>
-          <ac:cxnSpMkLst>
-            <pc:docMk/>
-            <pc:sldMk cId="0" sldId="269"/>
-            <ac:cxnSpMk id="249" creationId="{00000000-0000-0000-0000-000000000000}"/>
-          </ac:cxnSpMkLst>
-        </pc:cxnChg>
-      </pc:sldChg>
-      <pc:sldChg chg="modSp mod">
-        <pc:chgData name="Riccardo Berta" userId="c8694f89-bba4-4576-b0a8-456619ca5a8c" providerId="ADAL" clId="{97383AD6-40CD-6A43-8934-40A237B55ECF}" dt="2023-03-23T09:43:45.203" v="476"/>
-        <pc:sldMkLst>
-          <pc:docMk/>
-          <pc:sldMk cId="0" sldId="270"/>
-        </pc:sldMkLst>
-        <pc:spChg chg="mod">
-          <ac:chgData name="Riccardo Berta" userId="c8694f89-bba4-4576-b0a8-456619ca5a8c" providerId="ADAL" clId="{97383AD6-40CD-6A43-8934-40A237B55ECF}" dt="2023-03-23T09:43:11.795" v="474" actId="20577"/>
-          <ac:spMkLst>
-            <pc:docMk/>
-            <pc:sldMk cId="0" sldId="270"/>
-            <ac:spMk id="256" creationId="{00000000-0000-0000-0000-000000000000}"/>
-          </ac:spMkLst>
-        </pc:spChg>
-        <pc:picChg chg="mod">
-          <ac:chgData name="Riccardo Berta" userId="c8694f89-bba4-4576-b0a8-456619ca5a8c" providerId="ADAL" clId="{97383AD6-40CD-6A43-8934-40A237B55ECF}" dt="2023-03-23T09:43:45.203" v="476"/>
-          <ac:picMkLst>
-            <pc:docMk/>
-            <pc:sldMk cId="0" sldId="270"/>
-            <ac:picMk id="257" creationId="{00000000-0000-0000-0000-000000000000}"/>
-          </ac:picMkLst>
-        </pc:picChg>
-      </pc:sldChg>
-      <pc:sldChg chg="modSp mod">
-        <pc:chgData name="Riccardo Berta" userId="c8694f89-bba4-4576-b0a8-456619ca5a8c" providerId="ADAL" clId="{97383AD6-40CD-6A43-8934-40A237B55ECF}" dt="2023-03-23T09:45:26.098" v="521" actId="14100"/>
-        <pc:sldMkLst>
-          <pc:docMk/>
-          <pc:sldMk cId="0" sldId="271"/>
-        </pc:sldMkLst>
-        <pc:spChg chg="mod">
-          <ac:chgData name="Riccardo Berta" userId="c8694f89-bba4-4576-b0a8-456619ca5a8c" providerId="ADAL" clId="{97383AD6-40CD-6A43-8934-40A237B55ECF}" dt="2023-03-23T09:45:26.098" v="521" actId="14100"/>
-          <ac:spMkLst>
-            <pc:docMk/>
-            <pc:sldMk cId="0" sldId="271"/>
-            <ac:spMk id="263" creationId="{00000000-0000-0000-0000-000000000000}"/>
-          </ac:spMkLst>
-        </pc:spChg>
-        <pc:picChg chg="mod">
-          <ac:chgData name="Riccardo Berta" userId="c8694f89-bba4-4576-b0a8-456619ca5a8c" providerId="ADAL" clId="{97383AD6-40CD-6A43-8934-40A237B55ECF}" dt="2023-03-23T09:44:07.873" v="480"/>
-          <ac:picMkLst>
-            <pc:docMk/>
-            <pc:sldMk cId="0" sldId="271"/>
-            <ac:picMk id="264" creationId="{00000000-0000-0000-0000-000000000000}"/>
-          </ac:picMkLst>
-        </pc:picChg>
-      </pc:sldChg>
-      <pc:sldChg chg="addSp modSp mod">
-        <pc:chgData name="Riccardo Berta" userId="c8694f89-bba4-4576-b0a8-456619ca5a8c" providerId="ADAL" clId="{97383AD6-40CD-6A43-8934-40A237B55ECF}" dt="2023-03-23T09:48:51.803" v="529"/>
-        <pc:sldMkLst>
-          <pc:docMk/>
-          <pc:sldMk cId="0" sldId="272"/>
-        </pc:sldMkLst>
-        <pc:spChg chg="mod">
-          <ac:chgData name="Riccardo Berta" userId="c8694f89-bba4-4576-b0a8-456619ca5a8c" providerId="ADAL" clId="{97383AD6-40CD-6A43-8934-40A237B55ECF}" dt="2023-03-23T09:45:58.622" v="523" actId="20577"/>
-          <ac:spMkLst>
-            <pc:docMk/>
-            <pc:sldMk cId="0" sldId="272"/>
-            <ac:spMk id="270" creationId="{00000000-0000-0000-0000-000000000000}"/>
-          </ac:spMkLst>
-        </pc:spChg>
-        <pc:picChg chg="add mod">
-          <ac:chgData name="Riccardo Berta" userId="c8694f89-bba4-4576-b0a8-456619ca5a8c" providerId="ADAL" clId="{97383AD6-40CD-6A43-8934-40A237B55ECF}" dt="2023-03-23T09:48:51.803" v="529"/>
-          <ac:picMkLst>
-            <pc:docMk/>
-            <pc:sldMk cId="0" sldId="272"/>
-            <ac:picMk id="2" creationId="{DEFCEE63-100D-8A31-628D-2EB4AAFAE7D3}"/>
-          </ac:picMkLst>
-        </pc:picChg>
-        <pc:picChg chg="mod">
-          <ac:chgData name="Riccardo Berta" userId="c8694f89-bba4-4576-b0a8-456619ca5a8c" providerId="ADAL" clId="{97383AD6-40CD-6A43-8934-40A237B55ECF}" dt="2023-03-23T09:48:22.693" v="528" actId="1076"/>
-          <ac:picMkLst>
-            <pc:docMk/>
-            <pc:sldMk cId="0" sldId="272"/>
-            <ac:picMk id="271" creationId="{00000000-0000-0000-0000-000000000000}"/>
-          </ac:picMkLst>
-        </pc:picChg>
-        <pc:picChg chg="mod">
-          <ac:chgData name="Riccardo Berta" userId="c8694f89-bba4-4576-b0a8-456619ca5a8c" providerId="ADAL" clId="{97383AD6-40CD-6A43-8934-40A237B55ECF}" dt="2023-03-23T09:45:53.742" v="522"/>
-          <ac:picMkLst>
-            <pc:docMk/>
-            <pc:sldMk cId="0" sldId="272"/>
-            <ac:picMk id="272" creationId="{00000000-0000-0000-0000-000000000000}"/>
-          </ac:picMkLst>
-        </pc:picChg>
-      </pc:sldChg>
-      <pc:sldChg chg="delSp modSp mod">
-        <pc:chgData name="Riccardo Berta" userId="c8694f89-bba4-4576-b0a8-456619ca5a8c" providerId="ADAL" clId="{97383AD6-40CD-6A43-8934-40A237B55ECF}" dt="2023-03-23T09:51:34.931" v="557" actId="478"/>
-        <pc:sldMkLst>
-          <pc:docMk/>
-          <pc:sldMk cId="0" sldId="273"/>
-        </pc:sldMkLst>
-        <pc:grpChg chg="mod">
-          <ac:chgData name="Riccardo Berta" userId="c8694f89-bba4-4576-b0a8-456619ca5a8c" providerId="ADAL" clId="{97383AD6-40CD-6A43-8934-40A237B55ECF}" dt="2023-03-23T09:50:25.628" v="554" actId="1035"/>
-          <ac:grpSpMkLst>
-            <pc:docMk/>
-            <pc:sldMk cId="0" sldId="273"/>
-            <ac:grpSpMk id="279" creationId="{00000000-0000-0000-0000-000000000000}"/>
-          </ac:grpSpMkLst>
-        </pc:grpChg>
-        <pc:picChg chg="del">
-          <ac:chgData name="Riccardo Berta" userId="c8694f89-bba4-4576-b0a8-456619ca5a8c" providerId="ADAL" clId="{97383AD6-40CD-6A43-8934-40A237B55ECF}" dt="2023-03-23T09:51:34.931" v="557" actId="478"/>
-          <ac:picMkLst>
-            <pc:docMk/>
-            <pc:sldMk cId="0" sldId="273"/>
-            <ac:picMk id="283" creationId="{00000000-0000-0000-0000-000000000000}"/>
-          </ac:picMkLst>
-        </pc:picChg>
-      </pc:sldChg>
-      <pc:sldChg chg="modSp mod">
-        <pc:chgData name="Riccardo Berta" userId="c8694f89-bba4-4576-b0a8-456619ca5a8c" providerId="ADAL" clId="{97383AD6-40CD-6A43-8934-40A237B55ECF}" dt="2023-03-23T09:50:20.251" v="551" actId="1036"/>
-        <pc:sldMkLst>
-          <pc:docMk/>
-          <pc:sldMk cId="0" sldId="274"/>
-        </pc:sldMkLst>
-        <pc:spChg chg="mod">
-          <ac:chgData name="Riccardo Berta" userId="c8694f89-bba4-4576-b0a8-456619ca5a8c" providerId="ADAL" clId="{97383AD6-40CD-6A43-8934-40A237B55ECF}" dt="2023-03-23T09:50:14.688" v="543" actId="20577"/>
-          <ac:spMkLst>
-            <pc:docMk/>
-            <pc:sldMk cId="0" sldId="274"/>
-            <ac:spMk id="289" creationId="{00000000-0000-0000-0000-000000000000}"/>
-          </ac:spMkLst>
-        </pc:spChg>
-        <pc:grpChg chg="mod">
-          <ac:chgData name="Riccardo Berta" userId="c8694f89-bba4-4576-b0a8-456619ca5a8c" providerId="ADAL" clId="{97383AD6-40CD-6A43-8934-40A237B55ECF}" dt="2023-03-23T09:50:20.251" v="551" actId="1036"/>
-          <ac:grpSpMkLst>
-            <pc:docMk/>
-            <pc:sldMk cId="0" sldId="274"/>
-            <ac:grpSpMk id="290" creationId="{00000000-0000-0000-0000-000000000000}"/>
-          </ac:grpSpMkLst>
-        </pc:grpChg>
-        <pc:picChg chg="mod">
-          <ac:chgData name="Riccardo Berta" userId="c8694f89-bba4-4576-b0a8-456619ca5a8c" providerId="ADAL" clId="{97383AD6-40CD-6A43-8934-40A237B55ECF}" dt="2023-03-23T09:49:55.910" v="534" actId="1038"/>
-          <ac:picMkLst>
-            <pc:docMk/>
-            <pc:sldMk cId="0" sldId="274"/>
-            <ac:picMk id="296" creationId="{00000000-0000-0000-0000-000000000000}"/>
-          </ac:picMkLst>
-        </pc:picChg>
-      </pc:sldChg>
-      <pc:sldChg chg="modSp">
-        <pc:chgData name="Riccardo Berta" userId="c8694f89-bba4-4576-b0a8-456619ca5a8c" providerId="ADAL" clId="{97383AD6-40CD-6A43-8934-40A237B55ECF}" dt="2023-03-23T09:51:00.524" v="555"/>
-        <pc:sldMkLst>
-          <pc:docMk/>
-          <pc:sldMk cId="0" sldId="275"/>
-        </pc:sldMkLst>
-        <pc:picChg chg="mod">
-          <ac:chgData name="Riccardo Berta" userId="c8694f89-bba4-4576-b0a8-456619ca5a8c" providerId="ADAL" clId="{97383AD6-40CD-6A43-8934-40A237B55ECF}" dt="2023-03-23T09:51:00.524" v="555"/>
-          <ac:picMkLst>
-            <pc:docMk/>
-            <pc:sldMk cId="0" sldId="275"/>
-            <ac:picMk id="306" creationId="{00000000-0000-0000-0000-000000000000}"/>
-          </ac:picMkLst>
-        </pc:picChg>
-      </pc:sldChg>
-      <pc:sldChg chg="modSp">
-        <pc:chgData name="Riccardo Berta" userId="c8694f89-bba4-4576-b0a8-456619ca5a8c" providerId="ADAL" clId="{97383AD6-40CD-6A43-8934-40A237B55ECF}" dt="2023-03-23T09:51:31.272" v="556"/>
-        <pc:sldMkLst>
-          <pc:docMk/>
-          <pc:sldMk cId="0" sldId="276"/>
-        </pc:sldMkLst>
-        <pc:picChg chg="mod">
-          <ac:chgData name="Riccardo Berta" userId="c8694f89-bba4-4576-b0a8-456619ca5a8c" providerId="ADAL" clId="{97383AD6-40CD-6A43-8934-40A237B55ECF}" dt="2023-03-23T09:51:31.272" v="556"/>
-          <ac:picMkLst>
-            <pc:docMk/>
-            <pc:sldMk cId="0" sldId="276"/>
-            <ac:picMk id="317" creationId="{00000000-0000-0000-0000-000000000000}"/>
-          </ac:picMkLst>
-        </pc:picChg>
-      </pc:sldChg>
-      <pc:sldChg chg="modSp mod">
-        <pc:chgData name="Riccardo Berta" userId="c8694f89-bba4-4576-b0a8-456619ca5a8c" providerId="ADAL" clId="{97383AD6-40CD-6A43-8934-40A237B55ECF}" dt="2023-03-23T09:51:53.369" v="558" actId="20577"/>
-        <pc:sldMkLst>
-          <pc:docMk/>
-          <pc:sldMk cId="0" sldId="277"/>
-        </pc:sldMkLst>
-        <pc:spChg chg="mod">
-          <ac:chgData name="Riccardo Berta" userId="c8694f89-bba4-4576-b0a8-456619ca5a8c" providerId="ADAL" clId="{97383AD6-40CD-6A43-8934-40A237B55ECF}" dt="2023-03-23T09:51:53.369" v="558" actId="20577"/>
-          <ac:spMkLst>
-            <pc:docMk/>
-            <pc:sldMk cId="0" sldId="277"/>
-            <ac:spMk id="323" creationId="{00000000-0000-0000-0000-000000000000}"/>
+            <pc:sldMk cId="996632380" sldId="281"/>
+            <ac:spMk id="228" creationId="{73A632F2-1632-36D2-5554-7F877E477BF7}"/>
           </ac:spMkLst>
         </pc:spChg>
       </pc:sldChg>
@@ -4823,6 +3988,13 @@
             <a:tailEnd type="none" w="sm" len="sm"/>
           </a:ln>
         </p:spPr>
+        <p:txBody>
+          <a:bodyPr/>
+          <a:lstStyle/>
+          <a:p>
+            <a:endParaRPr lang="en-GB"/>
+          </a:p>
+        </p:txBody>
       </p:sp>
       <p:sp>
         <p:nvSpPr>
@@ -4866,6 +4038,13 @@
             <a:tailEnd type="none" w="sm" len="sm"/>
           </a:ln>
         </p:spPr>
+        <p:txBody>
+          <a:bodyPr/>
+          <a:lstStyle/>
+          <a:p>
+            <a:endParaRPr lang="en-GB"/>
+          </a:p>
+        </p:txBody>
       </p:sp>
       <p:sp>
         <p:nvSpPr>
@@ -5279,7 +4458,7 @@
             </a:pPr>
             <a:fld id="{00000000-1234-1234-1234-123412341234}" type="slidenum">
               <a:rPr lang="en-GB"/>
-              <a:t>‹#›</a:t>
+              <a:t>‹N›</a:t>
             </a:fld>
             <a:endParaRPr/>
           </a:p>
@@ -5746,7 +4925,7 @@
             </a:pPr>
             <a:fld id="{00000000-1234-1234-1234-123412341234}" type="slidenum">
               <a:rPr lang="en-GB"/>
-              <a:t>‹#›</a:t>
+              <a:t>‹N›</a:t>
             </a:fld>
             <a:endParaRPr/>
           </a:p>
@@ -5850,7 +5029,7 @@
             </a:pPr>
             <a:fld id="{00000000-1234-1234-1234-123412341234}" type="slidenum">
               <a:rPr lang="en-GB"/>
-              <a:t>‹#›</a:t>
+              <a:t>‹N›</a:t>
             </a:fld>
             <a:endParaRPr/>
           </a:p>
@@ -6379,7 +5558,7 @@
             </a:pPr>
             <a:fld id="{00000000-1234-1234-1234-123412341234}" type="slidenum">
               <a:rPr lang="en-GB"/>
-              <a:t>‹#›</a:t>
+              <a:t>‹N›</a:t>
             </a:fld>
             <a:endParaRPr/>
           </a:p>
@@ -6698,7 +5877,7 @@
             </a:pPr>
             <a:fld id="{00000000-1234-1234-1234-123412341234}" type="slidenum">
               <a:rPr lang="en-GB"/>
-              <a:t>‹#›</a:t>
+              <a:t>‹N›</a:t>
             </a:fld>
             <a:endParaRPr/>
           </a:p>
@@ -7100,7 +6279,7 @@
             </a:pPr>
             <a:fld id="{00000000-1234-1234-1234-123412341234}" type="slidenum">
               <a:rPr lang="en-GB"/>
-              <a:t>‹#›</a:t>
+              <a:t>‹N›</a:t>
             </a:fld>
             <a:endParaRPr/>
           </a:p>
@@ -7591,7 +6770,7 @@
             </a:pPr>
             <a:fld id="{00000000-1234-1234-1234-123412341234}" type="slidenum">
               <a:rPr lang="en-GB"/>
-              <a:t>‹#›</a:t>
+              <a:t>‹N›</a:t>
             </a:fld>
             <a:endParaRPr/>
           </a:p>
@@ -7824,7 +7003,7 @@
             </a:pPr>
             <a:fld id="{00000000-1234-1234-1234-123412341234}" type="slidenum">
               <a:rPr lang="en-GB"/>
-              <a:t>‹#›</a:t>
+              <a:t>‹N›</a:t>
             </a:fld>
             <a:endParaRPr/>
           </a:p>
@@ -8186,7 +7365,7 @@
             </a:pPr>
             <a:fld id="{00000000-1234-1234-1234-123412341234}" type="slidenum">
               <a:rPr lang="en-GB"/>
-              <a:t>‹#›</a:t>
+              <a:t>‹N›</a:t>
             </a:fld>
             <a:endParaRPr/>
           </a:p>
@@ -8459,7 +7638,7 @@
             </a:pPr>
             <a:fld id="{00000000-1234-1234-1234-123412341234}" type="slidenum">
               <a:rPr lang="en-GB"/>
-              <a:t>‹#›</a:t>
+              <a:t>‹N›</a:t>
             </a:fld>
             <a:endParaRPr/>
           </a:p>
@@ -9259,7 +8438,7 @@
             </a:pPr>
             <a:fld id="{00000000-1234-1234-1234-123412341234}" type="slidenum">
               <a:rPr lang="en-GB"/>
-              <a:t>‹#›</a:t>
+              <a:t>‹N›</a:t>
             </a:fld>
             <a:endParaRPr/>
           </a:p>
@@ -9578,7 +8757,7 @@
             </a:pPr>
             <a:fld id="{00000000-1234-1234-1234-123412341234}" type="slidenum">
               <a:rPr lang="en-GB"/>
-              <a:t>‹#›</a:t>
+              <a:t>‹N›</a:t>
             </a:fld>
             <a:endParaRPr/>
           </a:p>
@@ -9732,7 +8911,7 @@
             </a:pPr>
             <a:fld id="{00000000-1234-1234-1234-123412341234}" type="slidenum">
               <a:rPr lang="en-GB"/>
-              <a:t>‹#›</a:t>
+              <a:t>‹N›</a:t>
             </a:fld>
             <a:endParaRPr/>
           </a:p>
@@ -10199,7 +9378,7 @@
             </a:pPr>
             <a:fld id="{00000000-1234-1234-1234-123412341234}" type="slidenum">
               <a:rPr lang="en-GB"/>
-              <a:t>‹#›</a:t>
+              <a:t>‹N›</a:t>
             </a:fld>
             <a:endParaRPr/>
           </a:p>
@@ -10303,7 +9482,7 @@
             </a:pPr>
             <a:fld id="{00000000-1234-1234-1234-123412341234}" type="slidenum">
               <a:rPr lang="en-GB"/>
-              <a:t>‹#›</a:t>
+              <a:t>‹N›</a:t>
             </a:fld>
             <a:endParaRPr/>
           </a:p>
@@ -10705,7 +9884,7 @@
             </a:pPr>
             <a:fld id="{00000000-1234-1234-1234-123412341234}" type="slidenum">
               <a:rPr lang="en-GB"/>
-              <a:t>‹#›</a:t>
+              <a:t>‹N›</a:t>
             </a:fld>
             <a:endParaRPr/>
           </a:p>
@@ -11196,7 +10375,7 @@
             </a:pPr>
             <a:fld id="{00000000-1234-1234-1234-123412341234}" type="slidenum">
               <a:rPr lang="en-GB"/>
-              <a:t>‹#›</a:t>
+              <a:t>‹N›</a:t>
             </a:fld>
             <a:endParaRPr/>
           </a:p>
@@ -11429,7 +10608,7 @@
             </a:pPr>
             <a:fld id="{00000000-1234-1234-1234-123412341234}" type="slidenum">
               <a:rPr lang="en-GB"/>
-              <a:t>‹#›</a:t>
+              <a:t>‹N›</a:t>
             </a:fld>
             <a:endParaRPr/>
           </a:p>
@@ -11791,7 +10970,7 @@
             </a:pPr>
             <a:fld id="{00000000-1234-1234-1234-123412341234}" type="slidenum">
               <a:rPr lang="en-GB"/>
-              <a:t>‹#›</a:t>
+              <a:t>‹N›</a:t>
             </a:fld>
             <a:endParaRPr/>
           </a:p>
@@ -12064,7 +11243,7 @@
             </a:pPr>
             <a:fld id="{00000000-1234-1234-1234-123412341234}" type="slidenum">
               <a:rPr lang="en-GB"/>
-              <a:t>‹#›</a:t>
+              <a:t>‹N›</a:t>
             </a:fld>
             <a:endParaRPr/>
           </a:p>
@@ -12864,7 +12043,7 @@
             </a:pPr>
             <a:fld id="{00000000-1234-1234-1234-123412341234}" type="slidenum">
               <a:rPr lang="en-GB"/>
-              <a:t>‹#›</a:t>
+              <a:t>‹N›</a:t>
             </a:fld>
             <a:endParaRPr/>
           </a:p>
@@ -13018,7 +12197,7 @@
             </a:pPr>
             <a:fld id="{00000000-1234-1234-1234-123412341234}" type="slidenum">
               <a:rPr lang="en-GB"/>
-              <a:t>‹#›</a:t>
+              <a:t>‹N›</a:t>
             </a:fld>
             <a:endParaRPr/>
           </a:p>
@@ -13715,7 +12894,7 @@
             </a:pPr>
             <a:fld id="{00000000-1234-1234-1234-123412341234}" type="slidenum">
               <a:rPr lang="en-GB"/>
-              <a:t>‹#›</a:t>
+              <a:t>‹N›</a:t>
             </a:fld>
             <a:endParaRPr/>
           </a:p>
@@ -15113,7 +14292,7 @@
             </a:pPr>
             <a:fld id="{00000000-1234-1234-1234-123412341234}" type="slidenum">
               <a:rPr lang="en-GB"/>
-              <a:t>‹#›</a:t>
+              <a:t>‹N›</a:t>
             </a:fld>
             <a:endParaRPr/>
           </a:p>
@@ -16327,10 +15506,10 @@
       </p:sp>
       <p:pic>
         <p:nvPicPr>
-          <p:cNvPr id="3" name="Picture 2">
+          <p:cNvPr id="2" name="Immagine 1">
             <a:extLst>
               <a:ext uri="{FF2B5EF4-FFF2-40B4-BE49-F238E27FC236}">
-                <a16:creationId xmlns:a16="http://schemas.microsoft.com/office/drawing/2014/main" id="{75CE04BD-4DF3-7B6A-8E57-577F2936668C}"/>
+                <a16:creationId xmlns:a16="http://schemas.microsoft.com/office/drawing/2014/main" id="{9DAA82FC-073D-A822-122B-20CC6551EB73}"/>
               </a:ext>
             </a:extLst>
           </p:cNvPr>
@@ -16347,8 +15526,8 @@
         </p:blipFill>
         <p:spPr>
           <a:xfrm>
-            <a:off x="1583871" y="2767858"/>
-            <a:ext cx="6709586" cy="2688768"/>
+            <a:off x="1514140" y="2869979"/>
+            <a:ext cx="6500307" cy="2464541"/>
           </a:xfrm>
           <a:prstGeom prst="rect">
             <a:avLst/>
@@ -17954,12 +17133,16 @@
               <a:t> to specific actions or resources and have </a:t>
             </a:r>
             <a:r>
-              <a:rPr lang="en-GB" b="1" dirty="0"/>
+              <a:rPr lang="en-GB" b="1"/>
               <a:t>expiration times</a:t>
             </a:r>
             <a:r>
+              <a:rPr lang="en-GB"/>
+              <a:t>, </a:t>
+            </a:r>
+            <a:r>
               <a:rPr lang="en-GB" dirty="0"/>
-              <a:t>**, adding a layer of security</a:t>
+              <a:t>adding a layer of security</a:t>
             </a:r>
           </a:p>
           <a:p>
@@ -19783,10 +18966,10 @@
       </p:sp>
       <p:pic>
         <p:nvPicPr>
-          <p:cNvPr id="3" name="Picture 2">
+          <p:cNvPr id="2" name="Immagine 1">
             <a:extLst>
               <a:ext uri="{FF2B5EF4-FFF2-40B4-BE49-F238E27FC236}">
-                <a16:creationId xmlns:a16="http://schemas.microsoft.com/office/drawing/2014/main" id="{FEF13CAD-8013-E50E-52DC-93292D8A5289}"/>
+                <a16:creationId xmlns:a16="http://schemas.microsoft.com/office/drawing/2014/main" id="{F340A9E8-96FA-7499-3AF1-66E47ED550D0}"/>
               </a:ext>
             </a:extLst>
           </p:cNvPr>
@@ -19803,8 +18986,8 @@
         </p:blipFill>
         <p:spPr>
           <a:xfrm>
-            <a:off x="4833257" y="860600"/>
-            <a:ext cx="4310743" cy="1578134"/>
+            <a:off x="4635174" y="907043"/>
+            <a:ext cx="4197126" cy="1615630"/>
           </a:xfrm>
           <a:prstGeom prst="rect">
             <a:avLst/>
@@ -24017,66 +23200,6 @@
           </a:p>
         </p:txBody>
       </p:sp>
-      <p:pic>
-        <p:nvPicPr>
-          <p:cNvPr id="3" name="Picture 2">
-            <a:extLst>
-              <a:ext uri="{FF2B5EF4-FFF2-40B4-BE49-F238E27FC236}">
-                <a16:creationId xmlns:a16="http://schemas.microsoft.com/office/drawing/2014/main" id="{2BC676C8-E391-74D9-9631-19DD814DB2E3}"/>
-              </a:ext>
-            </a:extLst>
-          </p:cNvPr>
-          <p:cNvPicPr>
-            <a:picLocks noChangeAspect="1"/>
-          </p:cNvPicPr>
-          <p:nvPr/>
-        </p:nvPicPr>
-        <p:blipFill>
-          <a:blip r:embed="rId3"/>
-          <a:stretch>
-            <a:fillRect/>
-          </a:stretch>
-        </p:blipFill>
-        <p:spPr>
-          <a:xfrm>
-            <a:off x="685800" y="1670623"/>
-            <a:ext cx="7772400" cy="1758377"/>
-          </a:xfrm>
-          <a:prstGeom prst="rect">
-            <a:avLst/>
-          </a:prstGeom>
-        </p:spPr>
-      </p:pic>
-      <p:pic>
-        <p:nvPicPr>
-          <p:cNvPr id="5" name="Picture 4">
-            <a:extLst>
-              <a:ext uri="{FF2B5EF4-FFF2-40B4-BE49-F238E27FC236}">
-                <a16:creationId xmlns:a16="http://schemas.microsoft.com/office/drawing/2014/main" id="{9EDADE26-6341-E0DF-10B1-AB6A98FEA74E}"/>
-              </a:ext>
-            </a:extLst>
-          </p:cNvPr>
-          <p:cNvPicPr>
-            <a:picLocks noChangeAspect="1"/>
-          </p:cNvPicPr>
-          <p:nvPr/>
-        </p:nvPicPr>
-        <p:blipFill>
-          <a:blip r:embed="rId4"/>
-          <a:stretch>
-            <a:fillRect/>
-          </a:stretch>
-        </p:blipFill>
-        <p:spPr>
-          <a:xfrm>
-            <a:off x="685800" y="4045552"/>
-            <a:ext cx="7772400" cy="2116340"/>
-          </a:xfrm>
-          <a:prstGeom prst="rect">
-            <a:avLst/>
-          </a:prstGeom>
-        </p:spPr>
-      </p:pic>
       <p:sp>
         <p:nvSpPr>
           <p:cNvPr id="6" name="TextBox 5">
@@ -24147,6 +23270,66 @@
           </a:p>
         </p:txBody>
       </p:sp>
+      <p:pic>
+        <p:nvPicPr>
+          <p:cNvPr id="2" name="Immagine 1">
+            <a:extLst>
+              <a:ext uri="{FF2B5EF4-FFF2-40B4-BE49-F238E27FC236}">
+                <a16:creationId xmlns:a16="http://schemas.microsoft.com/office/drawing/2014/main" id="{DB73E912-8E2B-5F91-10D0-3BC8757B633B}"/>
+              </a:ext>
+            </a:extLst>
+          </p:cNvPr>
+          <p:cNvPicPr>
+            <a:picLocks noChangeAspect="1"/>
+          </p:cNvPicPr>
+          <p:nvPr/>
+        </p:nvPicPr>
+        <p:blipFill>
+          <a:blip r:embed="rId3"/>
+          <a:stretch>
+            <a:fillRect/>
+          </a:stretch>
+        </p:blipFill>
+        <p:spPr>
+          <a:xfrm>
+            <a:off x="685800" y="1904298"/>
+            <a:ext cx="7772400" cy="1589463"/>
+          </a:xfrm>
+          <a:prstGeom prst="rect">
+            <a:avLst/>
+          </a:prstGeom>
+        </p:spPr>
+      </p:pic>
+      <p:pic>
+        <p:nvPicPr>
+          <p:cNvPr id="4" name="Immagine 3">
+            <a:extLst>
+              <a:ext uri="{FF2B5EF4-FFF2-40B4-BE49-F238E27FC236}">
+                <a16:creationId xmlns:a16="http://schemas.microsoft.com/office/drawing/2014/main" id="{B3D26AEB-9AF5-2260-90BB-676F18C37842}"/>
+              </a:ext>
+            </a:extLst>
+          </p:cNvPr>
+          <p:cNvPicPr>
+            <a:picLocks noChangeAspect="1"/>
+          </p:cNvPicPr>
+          <p:nvPr/>
+        </p:nvPicPr>
+        <p:blipFill>
+          <a:blip r:embed="rId4"/>
+          <a:stretch>
+            <a:fillRect/>
+          </a:stretch>
+        </p:blipFill>
+        <p:spPr>
+          <a:xfrm>
+            <a:off x="685800" y="4063514"/>
+            <a:ext cx="7772400" cy="2349263"/>
+          </a:xfrm>
+          <a:prstGeom prst="rect">
+            <a:avLst/>
+          </a:prstGeom>
+        </p:spPr>
+      </p:pic>
     </p:spTree>
   </p:cSld>
   <p:clrMapOvr>
@@ -27270,6 +26453,26 @@
 </file>
 
 <file path=customXml/item1.xml><?xml version="1.0" encoding="utf-8"?>
+<p:properties xmlns:p="http://schemas.microsoft.com/office/2006/metadata/properties" xmlns:xsi="http://www.w3.org/2001/XMLSchema-instance" xmlns:pc="http://schemas.microsoft.com/office/infopath/2007/PartnerControls">
+  <documentManagement>
+    <TaxCatchAll xmlns="e9b5433c-2372-4cb7-8bab-09518096b29b" xsi:nil="true"/>
+    <lcf76f155ced4ddcb4097134ff3c332f xmlns="3bd0d43f-5e5b-43cd-b6fc-691bd77672c6">
+      <Terms xmlns="http://schemas.microsoft.com/office/infopath/2007/PartnerControls"/>
+    </lcf76f155ced4ddcb4097134ff3c332f>
+  </documentManagement>
+</p:properties>
+</file>
+
+<file path=customXml/item2.xml><?xml version="1.0" encoding="utf-8"?>
+<?mso-contentType ?>
+<FormTemplates xmlns="http://schemas.microsoft.com/sharepoint/v3/contenttype/forms">
+  <Display>DocumentLibraryForm</Display>
+  <Edit>DocumentLibraryForm</Edit>
+  <New>DocumentLibraryForm</New>
+</FormTemplates>
+</file>
+
+<file path=customXml/item3.xml><?xml version="1.0" encoding="utf-8"?>
 <ct:contentTypeSchema xmlns:ct="http://schemas.microsoft.com/office/2006/metadata/contentType" xmlns:ma="http://schemas.microsoft.com/office/2006/metadata/properties/metaAttributes" ct:_="" ma:_="" ma:contentTypeName="Documento" ma:contentTypeID="0x010100B8FA822B18A0634FB7342CF29752587A" ma:contentTypeVersion="13" ma:contentTypeDescription="Creare un nuovo documento." ma:contentTypeScope="" ma:versionID="5c5a1a1f66437ceed8e2102d49525b77">
   <xsd:schema xmlns:xsd="http://www.w3.org/2001/XMLSchema" xmlns:xs="http://www.w3.org/2001/XMLSchema" xmlns:p="http://schemas.microsoft.com/office/2006/metadata/properties" xmlns:ns2="3bd0d43f-5e5b-43cd-b6fc-691bd77672c6" xmlns:ns3="e9b5433c-2372-4cb7-8bab-09518096b29b" targetNamespace="http://schemas.microsoft.com/office/2006/metadata/properties" ma:root="true" ma:fieldsID="79bbaae61552c66980d55f32a6cab4b6" ns2:_="" ns3:_="">
     <xsd:import namespace="3bd0d43f-5e5b-43cd-b6fc-691bd77672c6"/>
@@ -27476,34 +26679,46 @@
 </ct:contentTypeSchema>
 </file>
 
-<file path=customXml/item2.xml><?xml version="1.0" encoding="utf-8"?>
-<?mso-contentType ?>
-<FormTemplates xmlns="http://schemas.microsoft.com/sharepoint/v3/contenttype/forms">
-  <Display>DocumentLibraryForm</Display>
-  <Edit>DocumentLibraryForm</Edit>
-  <New>DocumentLibraryForm</New>
-</FormTemplates>
-</file>
-
-<file path=customXml/item3.xml><?xml version="1.0" encoding="utf-8"?>
-<p:properties xmlns:p="http://schemas.microsoft.com/office/2006/metadata/properties" xmlns:xsi="http://www.w3.org/2001/XMLSchema-instance" xmlns:pc="http://schemas.microsoft.com/office/infopath/2007/PartnerControls">
-  <documentManagement>
-    <TaxCatchAll xmlns="e9b5433c-2372-4cb7-8bab-09518096b29b" xsi:nil="true"/>
-    <lcf76f155ced4ddcb4097134ff3c332f xmlns="3bd0d43f-5e5b-43cd-b6fc-691bd77672c6">
-      <Terms xmlns="http://schemas.microsoft.com/office/infopath/2007/PartnerControls"/>
-    </lcf76f155ced4ddcb4097134ff3c332f>
-  </documentManagement>
-</p:properties>
-</file>
-
 <file path=customXml/itemProps1.xml><?xml version="1.0" encoding="utf-8"?>
-<ds:datastoreItem xmlns:ds="http://schemas.openxmlformats.org/officeDocument/2006/customXml" ds:itemID="{E83A1F6A-8B6B-4F5E-9CCD-37213E20A1FC}"/>
+<ds:datastoreItem xmlns:ds="http://schemas.openxmlformats.org/officeDocument/2006/customXml" ds:itemID="{1595B601-9D0D-4CC7-B8CB-84E474B9C3D5}">
+  <ds:schemaRefs>
+    <ds:schemaRef ds:uri="e9b5433c-2372-4cb7-8bab-09518096b29b"/>
+    <ds:schemaRef ds:uri="http://purl.org/dc/terms/"/>
+    <ds:schemaRef ds:uri="3bd0d43f-5e5b-43cd-b6fc-691bd77672c6"/>
+    <ds:schemaRef ds:uri="http://purl.org/dc/elements/1.1/"/>
+    <ds:schemaRef ds:uri="http://schemas.microsoft.com/office/2006/documentManagement/types"/>
+    <ds:schemaRef ds:uri="http://www.w3.org/XML/1998/namespace"/>
+    <ds:schemaRef ds:uri="http://schemas.microsoft.com/office/infopath/2007/PartnerControls"/>
+    <ds:schemaRef ds:uri="http://schemas.openxmlformats.org/package/2006/metadata/core-properties"/>
+    <ds:schemaRef ds:uri="http://schemas.microsoft.com/office/2006/metadata/properties"/>
+    <ds:schemaRef ds:uri="http://purl.org/dc/dcmitype/"/>
+  </ds:schemaRefs>
+</ds:datastoreItem>
 </file>
 
 <file path=customXml/itemProps2.xml><?xml version="1.0" encoding="utf-8"?>
-<ds:datastoreItem xmlns:ds="http://schemas.openxmlformats.org/officeDocument/2006/customXml" ds:itemID="{EFB5009F-40E9-4F2F-8EC9-2357FE28D641}"/>
+<ds:datastoreItem xmlns:ds="http://schemas.openxmlformats.org/officeDocument/2006/customXml" ds:itemID="{EFB5009F-40E9-4F2F-8EC9-2357FE28D641}">
+  <ds:schemaRefs>
+    <ds:schemaRef ds:uri="http://schemas.microsoft.com/sharepoint/v3/contenttype/forms"/>
+  </ds:schemaRefs>
+</ds:datastoreItem>
 </file>
 
 <file path=customXml/itemProps3.xml><?xml version="1.0" encoding="utf-8"?>
-<ds:datastoreItem xmlns:ds="http://schemas.openxmlformats.org/officeDocument/2006/customXml" ds:itemID="{1595B601-9D0D-4CC7-B8CB-84E474B9C3D5}"/>
+<ds:datastoreItem xmlns:ds="http://schemas.openxmlformats.org/officeDocument/2006/customXml" ds:itemID="{E83A1F6A-8B6B-4F5E-9CCD-37213E20A1FC}">
+  <ds:schemaRefs>
+    <ds:schemaRef ds:uri="http://schemas.microsoft.com/office/2006/metadata/contentType"/>
+    <ds:schemaRef ds:uri="http://schemas.microsoft.com/office/2006/metadata/properties/metaAttributes"/>
+    <ds:schemaRef ds:uri="http://www.w3.org/2001/XMLSchema"/>
+    <ds:schemaRef ds:uri="http://schemas.microsoft.com/office/2006/metadata/properties"/>
+    <ds:schemaRef ds:uri="3bd0d43f-5e5b-43cd-b6fc-691bd77672c6"/>
+    <ds:schemaRef ds:uri="e9b5433c-2372-4cb7-8bab-09518096b29b"/>
+    <ds:schemaRef ds:uri="http://schemas.microsoft.com/office/2006/documentManagement/types"/>
+    <ds:schemaRef ds:uri="http://schemas.microsoft.com/office/infopath/2007/PartnerControls"/>
+    <ds:schemaRef ds:uri="http://schemas.openxmlformats.org/package/2006/metadata/core-properties"/>
+    <ds:schemaRef ds:uri="http://purl.org/dc/elements/1.1/"/>
+    <ds:schemaRef ds:uri="http://purl.org/dc/terms/"/>
+    <ds:schemaRef ds:uri="http://schemas.microsoft.com/internal/obd"/>
+  </ds:schemaRefs>
+</ds:datastoreItem>
 </file>